--- a/Backend/Materials/Review #2.pptx
+++ b/Backend/Materials/Review #2.pptx
@@ -19,14 +19,19 @@
     <p:sldId id="261" r:id="rId10"/>
     <p:sldId id="275" r:id="rId11"/>
     <p:sldId id="264" r:id="rId12"/>
+    <p:sldId id="282" r:id="rId33"/>
     <p:sldId id="274" r:id="rId13"/>
     <p:sldId id="265" r:id="rId14"/>
     <p:sldId id="273" r:id="rId15"/>
     <p:sldId id="266" r:id="rId16"/>
     <p:sldId id="272" r:id="rId17"/>
+    <p:sldId id="281" r:id="rId32"/>
     <p:sldId id="267" r:id="rId18"/>
+    <p:sldId id="280" r:id="rId31"/>
     <p:sldId id="271" r:id="rId19"/>
+    <p:sldId id="279" r:id="rId30"/>
     <p:sldId id="270" r:id="rId20"/>
+    <p:sldId id="278" r:id="rId29"/>
     <p:sldId id="268" r:id="rId21"/>
     <p:sldId id="262" r:id="rId22"/>
     <p:sldId id="269" r:id="rId23"/>
@@ -4531,99 +4536,6 @@
       </p:grpSpPr>
       <p:sp>
         <p:nvSpPr>
-          <p:cNvPr id="3" name="Content Placeholder 2">
-            <a:extLst>
-              <a:ext uri="{FF2B5EF4-FFF2-40B4-BE49-F238E27FC236}">
-                <a16:creationId xmlns:a16="http://schemas.microsoft.com/office/drawing/2014/main" id="{5BFBB131-7217-3694-F593-4021591CC64F}"/>
-              </a:ext>
-            </a:extLst>
-          </p:cNvPr>
-          <p:cNvSpPr>
-            <a:spLocks noGrp="1"/>
-          </p:cNvSpPr>
-          <p:nvPr>
-            <p:ph idx="1"/>
-          </p:nvPr>
-        </p:nvSpPr>
-        <p:spPr/>
-        <p:txBody>
-          <a:bodyPr wrap="square">
-            <a:normAutofit/>
-          </a:bodyPr>
-          <a:lstStyle/>
-          <a:p>
-            <a:pPr>
-              <a:spcAft>
-                <a:spcPts val="1400"/>
-              </a:spcAft>
-            </a:pPr>
-            <a:r>
-              <a:rPr sz="1500" b="1">
-                <a:solidFill>
-                  <a:srgbClr val="000000"/>
-                </a:solidFill>
-              </a:rPr>
-              <a:t>Volumetric Analytics and Reconstruction Engine: </a:t>
-            </a:r>
-            <a:r>
-              <a:rPr sz="1500" b="0">
-                <a:solidFill>
-                  <a:srgbClr val="000000"/>
-                </a:solidFill>
-              </a:rPr>
-              <a:t>Computes metric lesion volumes (in mm³ and cm³), generates colour-coded 2D multi-planar slice overlays (Axial, Coronal, Sagittal), and prepares 3D surface meshes.</a:t>
-            </a:r>
-          </a:p>
-          <a:p>
-            <a:pPr>
-              <a:spcAft>
-                <a:spcPts val="1400"/>
-              </a:spcAft>
-            </a:pPr>
-            <a:r>
-              <a:rPr sz="1500" b="1">
-                <a:solidFill>
-                  <a:srgbClr val="000000"/>
-                </a:solidFill>
-              </a:rPr>
-              <a:t>Presentation and Persistence Layer: </a:t>
-            </a:r>
-            <a:r>
-              <a:rPr sz="1500" b="0">
-                <a:solidFill>
-                  <a:srgbClr val="000000"/>
-                </a:solidFill>
-              </a:rPr>
-              <a:t>Renders interactive 3D visualisations via VTK.js, provides secure REST API endpoints via FastAPI, persists records in SQLite using SQLModel ORM, and exports structured PDF clinical summaries.</a:t>
-            </a:r>
-          </a:p>
-          <a:p>
-            <a:pPr>
-              <a:spcAft>
-                <a:spcPts val="1400"/>
-              </a:spcAft>
-            </a:pPr>
-            <a:r>
-              <a:rPr sz="1500" b="1">
-                <a:solidFill>
-                  <a:srgbClr val="000000"/>
-                </a:solidFill>
-              </a:rPr>
-              <a:t>End-to-End Flow: </a:t>
-            </a:r>
-            <a:r>
-              <a:rPr sz="1500" b="0">
-                <a:solidFill>
-                  <a:srgbClr val="000000"/>
-                </a:solidFill>
-              </a:rPr>
-              <a:t>Upload → preprocessing → Stage 1 detection → Stage 2 classification → Stage 3 segmentation → volumetrics and slice generation → interactive review → PDF report export, completed in under 30 seconds on GPU infrastructure.</a:t>
-            </a:r>
-          </a:p>
-        </p:txBody>
-      </p:sp>
-      <p:sp>
-        <p:nvSpPr>
           <p:cNvPr id="4" name="object 2">
             <a:extLst>
               <a:ext uri="{FF2B5EF4-FFF2-40B4-BE49-F238E27FC236}">
@@ -4666,7 +4578,7 @@
                 <a:latin typeface="Times New Roman" panose="02020603050405020304" pitchFamily="18" charset="0"/>
                 <a:cs typeface="Times New Roman" panose="02020603050405020304" pitchFamily="18" charset="0"/>
               </a:rPr>
-              <a:t>Framework/Architecture/Block Diagram (Contd.)</a:t>
+              <a:t>Methodology Pipeline</a:t>
             </a:r>
             <a:endParaRPr sz="3000" b="1" dirty="0">
               <a:latin typeface="Times New Roman" panose="02020603050405020304" pitchFamily="18" charset="0"/>
@@ -4776,6 +4688,30 @@
           </a:p>
         </p:txBody>
       </p:sp>
+      <p:pic>
+        <p:nvPicPr>
+          <p:cNvPr id="7" name="Picture 6" descr="methodology.png"/>
+          <p:cNvPicPr>
+            <a:picLocks noChangeAspect="1"/>
+          </p:cNvPicPr>
+          <p:nvPr/>
+        </p:nvPicPr>
+        <p:blipFill>
+          <a:blip r:embed="rId2"/>
+          <a:stretch>
+            <a:fillRect/>
+          </a:stretch>
+        </p:blipFill>
+        <p:spPr>
+          <a:xfrm>
+            <a:off x="2458058" y="1234440"/>
+            <a:ext cx="7245402" cy="5029200"/>
+          </a:xfrm>
+          <a:prstGeom prst="rect">
+            <a:avLst/>
+          </a:prstGeom>
+        </p:spPr>
+      </p:pic>
     </p:spTree>
     <p:extLst>
       <p:ext uri="{BB962C8B-B14F-4D97-AF65-F5344CB8AC3E}">
@@ -4797,7 +4733,7 @@
         <p:cNvPr id="1" name="">
           <a:extLst>
             <a:ext uri="{FF2B5EF4-FFF2-40B4-BE49-F238E27FC236}">
-              <a16:creationId xmlns:a16="http://schemas.microsoft.com/office/drawing/2014/main" id="{7FE95AF1-B807-AC15-9C1A-B86677AF63DA}"/>
+              <a16:creationId xmlns:a16="http://schemas.microsoft.com/office/drawing/2014/main" id="{08D49C0F-2490-21B4-8186-6F75540ACED9}"/>
             </a:ext>
           </a:extLst>
         </p:cNvPr>
@@ -4817,7 +4753,7 @@
           <p:cNvPr id="3" name="Content Placeholder 2">
             <a:extLst>
               <a:ext uri="{FF2B5EF4-FFF2-40B4-BE49-F238E27FC236}">
-                <a16:creationId xmlns:a16="http://schemas.microsoft.com/office/drawing/2014/main" id="{EEF324FF-B70A-2FC0-8FD0-C802E31DDBD0}"/>
+                <a16:creationId xmlns:a16="http://schemas.microsoft.com/office/drawing/2014/main" id="{5BFBB131-7217-3694-F593-4021591CC64F}"/>
               </a:ext>
             </a:extLst>
           </p:cNvPr>
@@ -4837,7 +4773,7 @@
           <a:p>
             <a:pPr>
               <a:spcAft>
-                <a:spcPts val="1200"/>
+                <a:spcPts val="1400"/>
               </a:spcAft>
             </a:pPr>
             <a:r>
@@ -4846,7 +4782,7 @@
                   <a:srgbClr val="000000"/>
                 </a:solidFill>
               </a:rPr>
-              <a:t>Multimodal MRI File Ingestion: </a:t>
+              <a:t>Volumetric Analytics and Reconstruction Engine: </a:t>
             </a:r>
             <a:r>
               <a:rPr sz="1500" b="0">
@@ -4854,13 +4790,13 @@
                   <a:srgbClr val="000000"/>
                 </a:solidFill>
               </a:rPr>
-              <a:t>Accept and parse 2D MRI slices and 3D volumetric NIfTI files (.nii, .nii.gz) containing T1, T1CE, T2 and FLAIR sequences.</a:t>
+              <a:t>Computes metric lesion volumes (in mm³ and cm³), generates colour-coded 2D multi-planar slice overlays (Axial, Coronal, Sagittal), and prepares 3D surface meshes.</a:t>
             </a:r>
           </a:p>
           <a:p>
             <a:pPr>
               <a:spcAft>
-                <a:spcPts val="1200"/>
+                <a:spcPts val="1400"/>
               </a:spcAft>
             </a:pPr>
             <a:r>
@@ -4869,7 +4805,7 @@
                   <a:srgbClr val="000000"/>
                 </a:solidFill>
               </a:rPr>
-              <a:t>Automated Image Preprocessing: </a:t>
+              <a:t>Presentation and Persistence Layer: </a:t>
             </a:r>
             <a:r>
               <a:rPr sz="1500" b="0">
@@ -4877,13 +4813,13 @@
                   <a:srgbClr val="000000"/>
                 </a:solidFill>
               </a:rPr>
-              <a:t>Perform automatic non-zero foreground z-score normalisation and spatial resampling to standard network dimensions.</a:t>
+              <a:t>Renders interactive 3D visualisations via VTK.js, provides secure REST API endpoints via FastAPI, persists records in SQLite using SQLModel ORM, and exports structured PDF clinical summaries.</a:t>
             </a:r>
           </a:p>
           <a:p>
             <a:pPr>
               <a:spcAft>
-                <a:spcPts val="1200"/>
+                <a:spcPts val="1400"/>
               </a:spcAft>
             </a:pPr>
             <a:r>
@@ -4892,7 +4828,7 @@
                   <a:srgbClr val="000000"/>
                 </a:solidFill>
               </a:rPr>
-              <a:t>Binary Tumour Detection: </a:t>
+              <a:t>End-to-End Flow: </a:t>
             </a:r>
             <a:r>
               <a:rPr sz="1500" b="0">
@@ -4900,53 +4836,7 @@
                   <a:srgbClr val="000000"/>
                 </a:solidFill>
               </a:rPr>
-              <a:t>Classify uploaded scans as tumour-positive or tumour-negative with associated classification confidence scores.</a:t>
-            </a:r>
-          </a:p>
-          <a:p>
-            <a:pPr>
-              <a:spcAft>
-                <a:spcPts val="1200"/>
-              </a:spcAft>
-            </a:pPr>
-            <a:r>
-              <a:rPr sz="1500" b="1">
-                <a:solidFill>
-                  <a:srgbClr val="000000"/>
-                </a:solidFill>
-              </a:rPr>
-              <a:t>Histological Subtype Classification: </a:t>
-            </a:r>
-            <a:r>
-              <a:rPr sz="1500" b="0">
-                <a:solidFill>
-                  <a:srgbClr val="000000"/>
-                </a:solidFill>
-              </a:rPr>
-              <a:t>Categorise tumour-positive scans into Glioma, Meningioma or Pituitary tumour classes with calibrated class probabilities.</a:t>
-            </a:r>
-          </a:p>
-          <a:p>
-            <a:pPr>
-              <a:spcAft>
-                <a:spcPts val="1200"/>
-              </a:spcAft>
-            </a:pPr>
-            <a:r>
-              <a:rPr sz="1500" b="1">
-                <a:solidFill>
-                  <a:srgbClr val="000000"/>
-                </a:solidFill>
-              </a:rPr>
-              <a:t>Multi-Region 3D Volumetric Segmentation: </a:t>
-            </a:r>
-            <a:r>
-              <a:rPr sz="1500" b="0">
-                <a:solidFill>
-                  <a:srgbClr val="000000"/>
-                </a:solidFill>
-              </a:rPr>
-              <a:t>Segment 3D MRI volumes into Whole Tumour (WT), Tumour Core (TC) and Enhancing Tumour (ET) sub-regions.</a:t>
+              <a:t>Upload → preprocessing → Stage 1 detection → Stage 2 classification → Stage 3 segmentation → volumetrics and slice generation → interactive review → PDF report export, completed in under 30 seconds on GPU infrastructure.</a:t>
             </a:r>
           </a:p>
         </p:txBody>
@@ -4956,7 +4846,7 @@
           <p:cNvPr id="4" name="object 2">
             <a:extLst>
               <a:ext uri="{FF2B5EF4-FFF2-40B4-BE49-F238E27FC236}">
-                <a16:creationId xmlns:a16="http://schemas.microsoft.com/office/drawing/2014/main" id="{0C9A0194-5820-F292-3A94-449C000E51A7}"/>
+                <a16:creationId xmlns:a16="http://schemas.microsoft.com/office/drawing/2014/main" id="{5DE9EA00-8D77-8DC9-1AE3-8B6FD1AF6BCC}"/>
               </a:ext>
             </a:extLst>
           </p:cNvPr>
@@ -4995,7 +4885,7 @@
                 <a:latin typeface="Times New Roman" panose="02020603050405020304" pitchFamily="18" charset="0"/>
                 <a:cs typeface="Times New Roman" panose="02020603050405020304" pitchFamily="18" charset="0"/>
               </a:rPr>
-              <a:t>Functional Requirements</a:t>
+              <a:t>Framework/Architecture/Block Diagram (Contd.)</a:t>
             </a:r>
             <a:endParaRPr sz="3000" b="1" dirty="0">
               <a:latin typeface="Times New Roman" panose="02020603050405020304" pitchFamily="18" charset="0"/>
@@ -5009,7 +4899,7 @@
           <p:cNvPr id="2" name="Date Placeholder 1">
             <a:extLst>
               <a:ext uri="{FF2B5EF4-FFF2-40B4-BE49-F238E27FC236}">
-                <a16:creationId xmlns:a16="http://schemas.microsoft.com/office/drawing/2014/main" id="{D4F25267-3005-EC45-A624-B78484DFA4EC}"/>
+                <a16:creationId xmlns:a16="http://schemas.microsoft.com/office/drawing/2014/main" id="{3B40592E-46EE-B4F2-7D01-D3568C2F685A}"/>
               </a:ext>
             </a:extLst>
           </p:cNvPr>
@@ -5044,7 +4934,7 @@
           <p:cNvPr id="5" name="Footer Placeholder 4">
             <a:extLst>
               <a:ext uri="{FF2B5EF4-FFF2-40B4-BE49-F238E27FC236}">
-                <a16:creationId xmlns:a16="http://schemas.microsoft.com/office/drawing/2014/main" id="{610022FF-AD0C-E15E-5F17-B2827B5546B1}"/>
+                <a16:creationId xmlns:a16="http://schemas.microsoft.com/office/drawing/2014/main" id="{5BCDC439-5940-84EE-247A-E3018795A431}"/>
               </a:ext>
             </a:extLst>
           </p:cNvPr>
@@ -5075,7 +4965,7 @@
           <p:cNvPr id="6" name="Slide Number Placeholder 5">
             <a:extLst>
               <a:ext uri="{FF2B5EF4-FFF2-40B4-BE49-F238E27FC236}">
-                <a16:creationId xmlns:a16="http://schemas.microsoft.com/office/drawing/2014/main" id="{BD8D6198-8B2C-26FB-53D2-A5B87C95A4FB}"/>
+                <a16:creationId xmlns:a16="http://schemas.microsoft.com/office/drawing/2014/main" id="{A6CB23C8-7091-8CFB-BF2C-3A19CCA810FF}"/>
               </a:ext>
             </a:extLst>
           </p:cNvPr>
@@ -5096,7 +4986,7 @@
                 <a:latin typeface="Times New Roman" panose="02020603050405020304" pitchFamily="18" charset="0"/>
                 <a:cs typeface="Times New Roman" panose="02020603050405020304" pitchFamily="18" charset="0"/>
               </a:rPr>
-              <a:t>13</a:t>
+              <a:t>12</a:t>
             </a:fld>
             <a:endParaRPr lang="en-IN" dirty="0">
               <a:latin typeface="Times New Roman" panose="02020603050405020304" pitchFamily="18" charset="0"/>
@@ -5108,7 +4998,7 @@
     </p:spTree>
     <p:extLst>
       <p:ext uri="{BB962C8B-B14F-4D97-AF65-F5344CB8AC3E}">
-        <p14:creationId xmlns:p14="http://schemas.microsoft.com/office/powerpoint/2010/main" val="3191299214"/>
+        <p14:creationId xmlns:p14="http://schemas.microsoft.com/office/powerpoint/2010/main" val="63813538"/>
       </p:ext>
     </p:extLst>
   </p:cSld>
@@ -5175,7 +5065,7 @@
                   <a:srgbClr val="000000"/>
                 </a:solidFill>
               </a:rPr>
-              <a:t>Quantitative Lesion Volumetry: </a:t>
+              <a:t>Multimodal MRI File Ingestion: </a:t>
             </a:r>
             <a:r>
               <a:rPr sz="1500" b="0">
@@ -5183,7 +5073,7 @@
                   <a:srgbClr val="000000"/>
                 </a:solidFill>
               </a:rPr>
-              <a:t>Calculate and display absolute physical tumour volumes in cubic millimetres (mm³) and cubic centimetres (cm³) for each segmented sub-region.</a:t>
+              <a:t>Accept and parse 2D MRI slices and 3D volumetric NIfTI files (.nii, .nii.gz) containing T1, T1CE, T2 and FLAIR sequences.</a:t>
             </a:r>
           </a:p>
           <a:p>
@@ -5198,7 +5088,7 @@
                   <a:srgbClr val="000000"/>
                 </a:solidFill>
               </a:rPr>
-              <a:t>Interactive Multi-Planar Visualisation: </a:t>
+              <a:t>Automated Image Preprocessing: </a:t>
             </a:r>
             <a:r>
               <a:rPr sz="1500" b="0">
@@ -5206,7 +5096,7 @@
                   <a:srgbClr val="000000"/>
                 </a:solidFill>
               </a:rPr>
-              <a:t>Render 2D multi-planar reconstruction views (Axial, Coronal, Sagittal) with adjustable slice sliders and colour-coded segmentation overlays.</a:t>
+              <a:t>Perform automatic non-zero foreground z-score normalisation and spatial resampling to standard network dimensions.</a:t>
             </a:r>
           </a:p>
           <a:p>
@@ -5221,7 +5111,7 @@
                   <a:srgbClr val="000000"/>
                 </a:solidFill>
               </a:rPr>
-              <a:t>Automated Diagnostic Reporting: </a:t>
+              <a:t>Binary Tumour Detection: </a:t>
             </a:r>
             <a:r>
               <a:rPr sz="1500" b="0">
@@ -5229,7 +5119,7 @@
                   <a:srgbClr val="000000"/>
                 </a:solidFill>
               </a:rPr>
-              <a:t>Generate and export downloadable PDF clinical reports summarising patient metadata, classification findings, volumetric measurements and key slice overlays.</a:t>
+              <a:t>Classify uploaded scans as tumour-positive or tumour-negative with associated classification confidence scores.</a:t>
             </a:r>
           </a:p>
           <a:p>
@@ -5244,7 +5134,7 @@
                   <a:srgbClr val="000000"/>
                 </a:solidFill>
               </a:rPr>
-              <a:t>Secure Authentication and Scan Library: </a:t>
+              <a:t>Histological Subtype Classification: </a:t>
             </a:r>
             <a:r>
               <a:rPr sz="1500" b="0">
@@ -5252,7 +5142,30 @@
                   <a:srgbClr val="000000"/>
                 </a:solidFill>
               </a:rPr>
-              <a:t>Provide JWT-based user authentication, bcrypt password hashing and user-isolated scan management.</a:t>
+              <a:t>Categorise tumour-positive scans into Glioma, Meningioma or Pituitary tumour classes with calibrated class probabilities.</a:t>
+            </a:r>
+          </a:p>
+          <a:p>
+            <a:pPr>
+              <a:spcAft>
+                <a:spcPts val="1200"/>
+              </a:spcAft>
+            </a:pPr>
+            <a:r>
+              <a:rPr sz="1500" b="1">
+                <a:solidFill>
+                  <a:srgbClr val="000000"/>
+                </a:solidFill>
+              </a:rPr>
+              <a:t>Multi-Region 3D Volumetric Segmentation: </a:t>
+            </a:r>
+            <a:r>
+              <a:rPr sz="1500" b="0">
+                <a:solidFill>
+                  <a:srgbClr val="000000"/>
+                </a:solidFill>
+              </a:rPr>
+              <a:t>Segment 3D MRI volumes into Whole Tumour (WT), Tumour Core (TC) and Enhancing Tumour (ET) sub-regions.</a:t>
             </a:r>
           </a:p>
         </p:txBody>
@@ -5301,7 +5214,7 @@
                 <a:latin typeface="Times New Roman" panose="02020603050405020304" pitchFamily="18" charset="0"/>
                 <a:cs typeface="Times New Roman" panose="02020603050405020304" pitchFamily="18" charset="0"/>
               </a:rPr>
-              <a:t>Functional Requirements (Contd.)</a:t>
+              <a:t>Functional Requirements</a:t>
             </a:r>
             <a:endParaRPr sz="3000" b="1" dirty="0">
               <a:latin typeface="Times New Roman" panose="02020603050405020304" pitchFamily="18" charset="0"/>
@@ -5338,7 +5251,7 @@
               </a:rPr>
               <a:t>07-09-2026</a:t>
             </a:fld>
-            <a:endParaRPr lang="en-IN" dirty="0">
+            <a:endParaRPr lang="en-IN">
               <a:latin typeface="Times New Roman" panose="02020603050405020304" pitchFamily="18" charset="0"/>
               <a:cs typeface="Times New Roman" panose="02020603050405020304" pitchFamily="18" charset="0"/>
             </a:endParaRPr>
@@ -5402,7 +5315,7 @@
                 <a:latin typeface="Times New Roman" panose="02020603050405020304" pitchFamily="18" charset="0"/>
                 <a:cs typeface="Times New Roman" panose="02020603050405020304" pitchFamily="18" charset="0"/>
               </a:rPr>
-              <a:t>14</a:t>
+              <a:t>13</a:t>
             </a:fld>
             <a:endParaRPr lang="en-IN" dirty="0">
               <a:latin typeface="Times New Roman" panose="02020603050405020304" pitchFamily="18" charset="0"/>
@@ -5432,7 +5345,7 @@
         <p:cNvPr id="1" name="">
           <a:extLst>
             <a:ext uri="{FF2B5EF4-FFF2-40B4-BE49-F238E27FC236}">
-              <a16:creationId xmlns:a16="http://schemas.microsoft.com/office/drawing/2014/main" id="{4D42F2ED-50F9-3DFA-95BB-1A1059C5D893}"/>
+              <a16:creationId xmlns:a16="http://schemas.microsoft.com/office/drawing/2014/main" id="{7FE95AF1-B807-AC15-9C1A-B86677AF63DA}"/>
             </a:ext>
           </a:extLst>
         </p:cNvPr>
@@ -5452,7 +5365,7 @@
           <p:cNvPr id="3" name="Content Placeholder 2">
             <a:extLst>
               <a:ext uri="{FF2B5EF4-FFF2-40B4-BE49-F238E27FC236}">
-                <a16:creationId xmlns:a16="http://schemas.microsoft.com/office/drawing/2014/main" id="{A93F2560-A5FE-A724-8F39-E7E901E8FADC}"/>
+                <a16:creationId xmlns:a16="http://schemas.microsoft.com/office/drawing/2014/main" id="{EEF324FF-B70A-2FC0-8FD0-C802E31DDBD0}"/>
               </a:ext>
             </a:extLst>
           </p:cNvPr>
@@ -5481,7 +5394,7 @@
                   <a:srgbClr val="000000"/>
                 </a:solidFill>
               </a:rPr>
-              <a:t>Module 1 - Preprocessing and Deduplication Pipeline: </a:t>
+              <a:t>Quantitative Lesion Volumetry: </a:t>
             </a:r>
             <a:r>
               <a:rPr sz="1500" b="0">
@@ -5489,7 +5402,7 @@
                   <a:srgbClr val="000000"/>
                 </a:solidFill>
               </a:rPr>
-              <a:t>Manages intensity normalisation, spatial resampling, training augmentations (rotations, flips, colour jitter), and perceptual hash deduplication (pHash, Hamming distance &lt;= 5) to prevent data leakage.</a:t>
+              <a:t>Calculate and display absolute physical tumour volumes in cubic millimetres (mm³) and cubic centimetres (cm³) for each segmented sub-region.</a:t>
             </a:r>
           </a:p>
           <a:p>
@@ -5504,7 +5417,7 @@
                   <a:srgbClr val="000000"/>
                 </a:solidFill>
               </a:rPr>
-              <a:t>Module 2 - Binary Tumour Detection Engine: </a:t>
+              <a:t>Interactive Multi-Planar Visualisation: </a:t>
             </a:r>
             <a:r>
               <a:rPr sz="1500" b="0">
@@ -5512,7 +5425,7 @@
                   <a:srgbClr val="000000"/>
                 </a:solidFill>
               </a:rPr>
-              <a:t>Encapsulates PyTorch inference using EfficientNetB0 (5.3M parameters) and InceptionV3 (23.9M parameters) for initial abnormal scan triage.</a:t>
+              <a:t>Render 2D multi-planar reconstruction views (Axial, Coronal, Sagittal) with adjustable slice sliders and colour-coded segmentation overlays.</a:t>
             </a:r>
           </a:p>
           <a:p>
@@ -5527,7 +5440,7 @@
                   <a:srgbClr val="000000"/>
                 </a:solidFill>
               </a:rPr>
-              <a:t>Module 3 - Multiclass Subtype Classification Engine: </a:t>
+              <a:t>Automated Diagnostic Reporting: </a:t>
             </a:r>
             <a:r>
               <a:rPr sz="1500" b="0">
@@ -5535,7 +5448,7 @@
                   <a:srgbClr val="000000"/>
                 </a:solidFill>
               </a:rPr>
-              <a:t>Implements deep classifiers (EfficientNetB0, InceptionV3, Swin Base) categorising confirmed tumours into glioma, meningioma and pituitary types.</a:t>
+              <a:t>Generate and export downloadable PDF clinical reports summarising patient metadata, classification findings, volumetric measurements and key slice overlays.</a:t>
             </a:r>
           </a:p>
           <a:p>
@@ -5550,7 +5463,7 @@
                   <a:srgbClr val="000000"/>
                 </a:solidFill>
               </a:rPr>
-              <a:t>Module 4 - 3D Volumetric Segmentation Engine: </a:t>
+              <a:t>Secure Authentication and Scan Library: </a:t>
             </a:r>
             <a:r>
               <a:rPr sz="1500" b="0">
@@ -5558,7 +5471,7 @@
                   <a:srgbClr val="000000"/>
                 </a:solidFill>
               </a:rPr>
-              <a:t>Houses 3D convolutional architectures (VNet, UNet, nnU-Net) operating on 4-channel stacked volumes to produce voxel-wise multi-label segmentation masks.</a:t>
+              <a:t>Provide JWT-based user authentication, bcrypt password hashing and user-isolated scan management.</a:t>
             </a:r>
           </a:p>
         </p:txBody>
@@ -5568,7 +5481,7 @@
           <p:cNvPr id="4" name="object 2">
             <a:extLst>
               <a:ext uri="{FF2B5EF4-FFF2-40B4-BE49-F238E27FC236}">
-                <a16:creationId xmlns:a16="http://schemas.microsoft.com/office/drawing/2014/main" id="{B27DA514-48FC-4BF4-8205-DE21D456C5FF}"/>
+                <a16:creationId xmlns:a16="http://schemas.microsoft.com/office/drawing/2014/main" id="{0C9A0194-5820-F292-3A94-449C000E51A7}"/>
               </a:ext>
             </a:extLst>
           </p:cNvPr>
@@ -5607,7 +5520,7 @@
                 <a:latin typeface="Times New Roman" panose="02020603050405020304" pitchFamily="18" charset="0"/>
                 <a:cs typeface="Times New Roman" panose="02020603050405020304" pitchFamily="18" charset="0"/>
               </a:rPr>
-              <a:t>Modules</a:t>
+              <a:t>Functional Requirements (Contd.)</a:t>
             </a:r>
             <a:endParaRPr sz="3000" b="1" dirty="0">
               <a:latin typeface="Times New Roman" panose="02020603050405020304" pitchFamily="18" charset="0"/>
@@ -5621,7 +5534,7 @@
           <p:cNvPr id="2" name="Date Placeholder 1">
             <a:extLst>
               <a:ext uri="{FF2B5EF4-FFF2-40B4-BE49-F238E27FC236}">
-                <a16:creationId xmlns:a16="http://schemas.microsoft.com/office/drawing/2014/main" id="{D74A04E0-6631-130F-A154-C85D978EA39B}"/>
+                <a16:creationId xmlns:a16="http://schemas.microsoft.com/office/drawing/2014/main" id="{D4F25267-3005-EC45-A624-B78484DFA4EC}"/>
               </a:ext>
             </a:extLst>
           </p:cNvPr>
@@ -5643,72 +5556,6 @@
                 <a:cs typeface="Times New Roman" panose="02020603050405020304" pitchFamily="18" charset="0"/>
               </a:rPr>
               <a:t>07-09-2026</a:t>
-            </a:fld>
-            <a:endParaRPr lang="en-IN">
-              <a:latin typeface="Times New Roman" panose="02020603050405020304" pitchFamily="18" charset="0"/>
-              <a:cs typeface="Times New Roman" panose="02020603050405020304" pitchFamily="18" charset="0"/>
-            </a:endParaRPr>
-          </a:p>
-        </p:txBody>
-      </p:sp>
-      <p:sp>
-        <p:nvSpPr>
-          <p:cNvPr id="5" name="Footer Placeholder 4">
-            <a:extLst>
-              <a:ext uri="{FF2B5EF4-FFF2-40B4-BE49-F238E27FC236}">
-                <a16:creationId xmlns:a16="http://schemas.microsoft.com/office/drawing/2014/main" id="{39615995-EDEB-C984-B852-1229C23B1A05}"/>
-              </a:ext>
-            </a:extLst>
-          </p:cNvPr>
-          <p:cNvSpPr>
-            <a:spLocks noGrp="1"/>
-          </p:cNvSpPr>
-          <p:nvPr>
-            <p:ph type="ftr" sz="quarter" idx="11"/>
-          </p:nvPr>
-        </p:nvSpPr>
-        <p:spPr/>
-        <p:txBody>
-          <a:bodyPr/>
-          <a:lstStyle/>
-          <a:p>
-            <a:r>
-              <a:rPr lang="en-IN" dirty="0">
-                <a:latin typeface="Times New Roman" panose="02020603050405020304" pitchFamily="18" charset="0"/>
-                <a:cs typeface="Times New Roman" panose="02020603050405020304" pitchFamily="18" charset="0"/>
-              </a:rPr>
-              <a:t>SCOPE</a:t>
-            </a:r>
-          </a:p>
-        </p:txBody>
-      </p:sp>
-      <p:sp>
-        <p:nvSpPr>
-          <p:cNvPr id="6" name="Slide Number Placeholder 5">
-            <a:extLst>
-              <a:ext uri="{FF2B5EF4-FFF2-40B4-BE49-F238E27FC236}">
-                <a16:creationId xmlns:a16="http://schemas.microsoft.com/office/drawing/2014/main" id="{067F5109-389C-3E37-E553-A559233EFD96}"/>
-              </a:ext>
-            </a:extLst>
-          </p:cNvPr>
-          <p:cNvSpPr>
-            <a:spLocks noGrp="1"/>
-          </p:cNvSpPr>
-          <p:nvPr>
-            <p:ph type="sldNum" sz="quarter" idx="12"/>
-          </p:nvPr>
-        </p:nvSpPr>
-        <p:spPr/>
-        <p:txBody>
-          <a:bodyPr/>
-          <a:lstStyle/>
-          <a:p>
-            <a:fld id="{65201FD4-9D8D-4491-815B-63C7BF4F0034}" type="slidenum">
-              <a:rPr lang="en-IN" smtClean="0">
-                <a:latin typeface="Times New Roman" panose="02020603050405020304" pitchFamily="18" charset="0"/>
-                <a:cs typeface="Times New Roman" panose="02020603050405020304" pitchFamily="18" charset="0"/>
-              </a:rPr>
-              <a:t>15</a:t>
             </a:fld>
             <a:endParaRPr lang="en-IN" dirty="0">
               <a:latin typeface="Times New Roman" panose="02020603050405020304" pitchFamily="18" charset="0"/>
@@ -5717,10 +5564,76 @@
           </a:p>
         </p:txBody>
       </p:sp>
+      <p:sp>
+        <p:nvSpPr>
+          <p:cNvPr id="5" name="Footer Placeholder 4">
+            <a:extLst>
+              <a:ext uri="{FF2B5EF4-FFF2-40B4-BE49-F238E27FC236}">
+                <a16:creationId xmlns:a16="http://schemas.microsoft.com/office/drawing/2014/main" id="{610022FF-AD0C-E15E-5F17-B2827B5546B1}"/>
+              </a:ext>
+            </a:extLst>
+          </p:cNvPr>
+          <p:cNvSpPr>
+            <a:spLocks noGrp="1"/>
+          </p:cNvSpPr>
+          <p:nvPr>
+            <p:ph type="ftr" sz="quarter" idx="11"/>
+          </p:nvPr>
+        </p:nvSpPr>
+        <p:spPr/>
+        <p:txBody>
+          <a:bodyPr/>
+          <a:lstStyle/>
+          <a:p>
+            <a:r>
+              <a:rPr lang="en-IN" dirty="0">
+                <a:latin typeface="Times New Roman" panose="02020603050405020304" pitchFamily="18" charset="0"/>
+                <a:cs typeface="Times New Roman" panose="02020603050405020304" pitchFamily="18" charset="0"/>
+              </a:rPr>
+              <a:t>SCOPE</a:t>
+            </a:r>
+          </a:p>
+        </p:txBody>
+      </p:sp>
+      <p:sp>
+        <p:nvSpPr>
+          <p:cNvPr id="6" name="Slide Number Placeholder 5">
+            <a:extLst>
+              <a:ext uri="{FF2B5EF4-FFF2-40B4-BE49-F238E27FC236}">
+                <a16:creationId xmlns:a16="http://schemas.microsoft.com/office/drawing/2014/main" id="{BD8D6198-8B2C-26FB-53D2-A5B87C95A4FB}"/>
+              </a:ext>
+            </a:extLst>
+          </p:cNvPr>
+          <p:cNvSpPr>
+            <a:spLocks noGrp="1"/>
+          </p:cNvSpPr>
+          <p:nvPr>
+            <p:ph type="sldNum" sz="quarter" idx="12"/>
+          </p:nvPr>
+        </p:nvSpPr>
+        <p:spPr/>
+        <p:txBody>
+          <a:bodyPr/>
+          <a:lstStyle/>
+          <a:p>
+            <a:fld id="{65201FD4-9D8D-4491-815B-63C7BF4F0034}" type="slidenum">
+              <a:rPr lang="en-IN" smtClean="0">
+                <a:latin typeface="Times New Roman" panose="02020603050405020304" pitchFamily="18" charset="0"/>
+                <a:cs typeface="Times New Roman" panose="02020603050405020304" pitchFamily="18" charset="0"/>
+              </a:rPr>
+              <a:t>14</a:t>
+            </a:fld>
+            <a:endParaRPr lang="en-IN" dirty="0">
+              <a:latin typeface="Times New Roman" panose="02020603050405020304" pitchFamily="18" charset="0"/>
+              <a:cs typeface="Times New Roman" panose="02020603050405020304" pitchFamily="18" charset="0"/>
+            </a:endParaRPr>
+          </a:p>
+        </p:txBody>
+      </p:sp>
     </p:spTree>
     <p:extLst>
       <p:ext uri="{BB962C8B-B14F-4D97-AF65-F5344CB8AC3E}">
-        <p14:creationId xmlns:p14="http://schemas.microsoft.com/office/powerpoint/2010/main" val="3799870327"/>
+        <p14:creationId xmlns:p14="http://schemas.microsoft.com/office/powerpoint/2010/main" val="3191299214"/>
       </p:ext>
     </p:extLst>
   </p:cSld>
@@ -5778,7 +5691,7 @@
           <a:p>
             <a:pPr>
               <a:spcAft>
-                <a:spcPts val="1400"/>
+                <a:spcPts val="1200"/>
               </a:spcAft>
             </a:pPr>
             <a:r>
@@ -5787,7 +5700,7 @@
                   <a:srgbClr val="000000"/>
                 </a:solidFill>
               </a:rPr>
-              <a:t>Module 5 - Clinical Analytics and Volumetrics Module: </a:t>
+              <a:t>Module 1 - Preprocessing and Deduplication Pipeline: </a:t>
             </a:r>
             <a:r>
               <a:rPr sz="1500" b="0">
@@ -5795,13 +5708,13 @@
                   <a:srgbClr val="000000"/>
                 </a:solidFill>
               </a:rPr>
-              <a:t>Computes physical sub-region volumes via voxel summation and spacing metadata, extracts 2D cross-sectional slices across all anatomical axes, and applies alpha-blended colour overlays.</a:t>
+              <a:t>Manages intensity normalisation, spatial resampling, training augmentations (rotations, flips, colour jitter), and perceptual hash deduplication (pHash, Hamming distance &lt;= 5) to prevent data leakage.</a:t>
             </a:r>
           </a:p>
           <a:p>
             <a:pPr>
               <a:spcAft>
-                <a:spcPts val="1400"/>
+                <a:spcPts val="1200"/>
               </a:spcAft>
             </a:pPr>
             <a:r>
@@ -5810,7 +5723,7 @@
                   <a:srgbClr val="000000"/>
                 </a:solidFill>
               </a:rPr>
-              <a:t>Module 6 - Backend REST API and Persistence Service: </a:t>
+              <a:t>Module 2 - Binary Tumour Detection Engine: </a:t>
             </a:r>
             <a:r>
               <a:rPr sz="1500" b="0">
@@ -5818,13 +5731,13 @@
                   <a:srgbClr val="000000"/>
                 </a:solidFill>
               </a:rPr>
-              <a:t>Built with FastAPI and SQLModel ORM over SQLite; manages asynchronous inference pipelines, JWT authentication and file storage.</a:t>
+              <a:t>Encapsulates PyTorch inference using EfficientNetB0 (5.3M parameters) and InceptionV3 (23.9M parameters) for initial abnormal scan triage.</a:t>
             </a:r>
           </a:p>
           <a:p>
             <a:pPr>
               <a:spcAft>
-                <a:spcPts val="1400"/>
+                <a:spcPts val="1200"/>
               </a:spcAft>
             </a:pPr>
             <a:r>
@@ -5833,7 +5746,7 @@
                   <a:srgbClr val="000000"/>
                 </a:solidFill>
               </a:rPr>
-              <a:t>Module 7 - Frontend Clinical Dashboard and Visualiser: </a:t>
+              <a:t>Module 3 - Multiclass Subtype Classification Engine: </a:t>
             </a:r>
             <a:r>
               <a:rPr sz="1500" b="0">
@@ -5841,7 +5754,30 @@
                   <a:srgbClr val="000000"/>
                 </a:solidFill>
               </a:rPr>
-              <a:t>Developed using React 18, TypeScript, Tailwind CSS, shadcn/ui and VTK.js for interactive 3D volume rendering and responsive medical workflow navigation.</a:t>
+              <a:t>Implements deep classifiers (EfficientNetB0, InceptionV3, Swin Base) categorising confirmed tumours into glioma, meningioma and pituitary types.</a:t>
+            </a:r>
+          </a:p>
+          <a:p>
+            <a:pPr>
+              <a:spcAft>
+                <a:spcPts val="1200"/>
+              </a:spcAft>
+            </a:pPr>
+            <a:r>
+              <a:rPr sz="1500" b="1">
+                <a:solidFill>
+                  <a:srgbClr val="000000"/>
+                </a:solidFill>
+              </a:rPr>
+              <a:t>Module 4 - 3D Volumetric Segmentation Engine: </a:t>
+            </a:r>
+            <a:r>
+              <a:rPr sz="1500" b="0">
+                <a:solidFill>
+                  <a:srgbClr val="000000"/>
+                </a:solidFill>
+              </a:rPr>
+              <a:t>Houses 3D convolutional architectures (VNet, UNet, nnU-Net) operating on 4-channel stacked volumes to produce voxel-wise multi-label segmentation masks.</a:t>
             </a:r>
           </a:p>
         </p:txBody>
@@ -5890,7 +5826,7 @@
                 <a:latin typeface="Times New Roman" panose="02020603050405020304" pitchFamily="18" charset="0"/>
                 <a:cs typeface="Times New Roman" panose="02020603050405020304" pitchFamily="18" charset="0"/>
               </a:rPr>
-              <a:t>Modules (Contd.)</a:t>
+              <a:t>Modules</a:t>
             </a:r>
             <a:endParaRPr sz="3000" b="1" dirty="0">
               <a:latin typeface="Times New Roman" panose="02020603050405020304" pitchFamily="18" charset="0"/>
@@ -5991,7 +5927,7 @@
                 <a:latin typeface="Times New Roman" panose="02020603050405020304" pitchFamily="18" charset="0"/>
                 <a:cs typeface="Times New Roman" panose="02020603050405020304" pitchFamily="18" charset="0"/>
               </a:rPr>
-              <a:t>16</a:t>
+              <a:t>15</a:t>
             </a:fld>
             <a:endParaRPr lang="en-IN" dirty="0">
               <a:latin typeface="Times New Roman" panose="02020603050405020304" pitchFamily="18" charset="0"/>
@@ -6021,7 +5957,7 @@
         <p:cNvPr id="1" name="">
           <a:extLst>
             <a:ext uri="{FF2B5EF4-FFF2-40B4-BE49-F238E27FC236}">
-              <a16:creationId xmlns:a16="http://schemas.microsoft.com/office/drawing/2014/main" id="{121556E8-0003-02C5-D37D-A5CC4CE44D5B}"/>
+              <a16:creationId xmlns:a16="http://schemas.microsoft.com/office/drawing/2014/main" id="{4D42F2ED-50F9-3DFA-95BB-1A1059C5D893}"/>
             </a:ext>
           </a:extLst>
         </p:cNvPr>
@@ -6041,7 +5977,7 @@
           <p:cNvPr id="3" name="Content Placeholder 2">
             <a:extLst>
               <a:ext uri="{FF2B5EF4-FFF2-40B4-BE49-F238E27FC236}">
-                <a16:creationId xmlns:a16="http://schemas.microsoft.com/office/drawing/2014/main" id="{DFB67973-736B-B05D-D378-DA7CBE3EBDAD}"/>
+                <a16:creationId xmlns:a16="http://schemas.microsoft.com/office/drawing/2014/main" id="{A93F2560-A5FE-A724-8F39-E7E901E8FADC}"/>
               </a:ext>
             </a:extLst>
           </p:cNvPr>
@@ -6061,151 +5997,70 @@
           <a:p>
             <a:pPr>
               <a:spcAft>
-                <a:spcPts val="400"/>
+                <a:spcPts val="1400"/>
               </a:spcAft>
             </a:pPr>
             <a:r>
-              <a:rPr sz="1400" b="1">
+              <a:rPr sz="1500" b="1">
                 <a:solidFill>
                   <a:srgbClr val="000000"/>
                 </a:solidFill>
               </a:rPr>
-              <a:t>2D Binary Tumour Detection (3,253 images; 488 test samples)</a:t>
-            </a:r>
-          </a:p>
-          <a:p>
-            <a:pPr lvl="1">
+              <a:t>Module 5 - Clinical Analytics and Volumetrics Module: </a:t>
+            </a:r>
+            <a:r>
+              <a:rPr sz="1500" b="0">
+                <a:solidFill>
+                  <a:srgbClr val="000000"/>
+                </a:solidFill>
+              </a:rPr>
+              <a:t>Computes physical sub-region volumes via voxel summation and spacing metadata, extracts 2D cross-sectional slices across all anatomical axes, and applies alpha-blended colour overlays.</a:t>
+            </a:r>
+          </a:p>
+          <a:p>
+            <a:pPr>
               <a:spcAft>
-                <a:spcPts val="400"/>
+                <a:spcPts val="1400"/>
               </a:spcAft>
             </a:pPr>
             <a:r>
-              <a:rPr sz="1300" b="0">
+              <a:rPr sz="1500" b="1">
                 <a:solidFill>
                   <a:srgbClr val="000000"/>
                 </a:solidFill>
               </a:rPr>
-              <a:t>CoaTNet-0: Accuracy 99.59%, AUC 1.0000, Best Val AUC 0.9999 (Epoch 7), ~10M parameters</a:t>
-            </a:r>
-          </a:p>
-          <a:p>
-            <a:pPr lvl="1">
+              <a:t>Module 6 - Backend REST API and Persistence Service: </a:t>
+            </a:r>
+            <a:r>
+              <a:rPr sz="1500" b="0">
+                <a:solidFill>
+                  <a:srgbClr val="000000"/>
+                </a:solidFill>
+              </a:rPr>
+              <a:t>Built with FastAPI and SQLModel ORM over SQLite; manages asynchronous inference pipelines, JWT authentication and file storage.</a:t>
+            </a:r>
+          </a:p>
+          <a:p>
+            <a:pPr>
               <a:spcAft>
-                <a:spcPts val="400"/>
+                <a:spcPts val="1400"/>
               </a:spcAft>
             </a:pPr>
             <a:r>
-              <a:rPr sz="1300" b="0">
+              <a:rPr sz="1500" b="1">
                 <a:solidFill>
                   <a:srgbClr val="000000"/>
                 </a:solidFill>
               </a:rPr>
-              <a:t>EfficientNetB0: Accuracy 99.59%, AUC 0.9999, Best Val AUC 0.9999 (Epoch 4), 5.3M parameters (optimal efficiency)</a:t>
-            </a:r>
-          </a:p>
-          <a:p>
-            <a:pPr lvl="1">
-              <a:spcAft>
-                <a:spcPts val="400"/>
-              </a:spcAft>
-            </a:pPr>
-            <a:r>
-              <a:rPr sz="1300" b="0">
+              <a:t>Module 7 - Frontend Clinical Dashboard and Visualiser: </a:t>
+            </a:r>
+            <a:r>
+              <a:rPr sz="1500" b="0">
                 <a:solidFill>
                   <a:srgbClr val="000000"/>
                 </a:solidFill>
               </a:rPr>
-              <a:t>InceptionV3: Accuracy 99.39%, AUC 1.0000, Best Val AUC 0.9999 (Epoch 2), 23.9M parameters</a:t>
-            </a:r>
-          </a:p>
-          <a:p>
-            <a:pPr lvl="1">
-              <a:spcAft>
-                <a:spcPts val="400"/>
-              </a:spcAft>
-            </a:pPr>
-            <a:r>
-              <a:rPr sz="1300" b="0">
-                <a:solidFill>
-                  <a:srgbClr val="000000"/>
-                </a:solidFill>
-              </a:rPr>
-              <a:t>ResNet50: Accuracy 99.39%, AUC 0.9999, Best Val AUC 0.9999 (Epoch 6), 25.6M parameters</a:t>
-            </a:r>
-          </a:p>
-          <a:p>
-            <a:pPr lvl="1">
-              <a:spcAft>
-                <a:spcPts val="400"/>
-              </a:spcAft>
-            </a:pPr>
-            <a:r>
-              <a:rPr sz="1300" b="0">
-                <a:solidFill>
-                  <a:srgbClr val="000000"/>
-                </a:solidFill>
-              </a:rPr>
-              <a:t>DenseNet121: Accuracy 97.95%, AUC 0.9999, Best Val AUC 1.0000 (Epoch 1), 8.0M parameters</a:t>
-            </a:r>
-          </a:p>
-          <a:p>
-            <a:pPr lvl="1">
-              <a:spcAft>
-                <a:spcPts val="400"/>
-              </a:spcAft>
-            </a:pPr>
-            <a:r>
-              <a:rPr sz="1300" b="0">
-                <a:solidFill>
-                  <a:srgbClr val="000000"/>
-                </a:solidFill>
-              </a:rPr>
-              <a:t>Swin Base: Accuracy 98.16%, AUC 0.9990, Best Val AUC 0.9988 (Epoch 6), 88M parameters</a:t>
-            </a:r>
-          </a:p>
-          <a:p>
-            <a:pPr lvl="1">
-              <a:spcAft>
-                <a:spcPts val="400"/>
-              </a:spcAft>
-            </a:pPr>
-            <a:r>
-              <a:rPr sz="1300" b="0">
-                <a:solidFill>
-                  <a:srgbClr val="000000"/>
-                </a:solidFill>
-              </a:rPr>
-              <a:t>ViT-B/16: Accuracy 95.08%, AUC 0.9861, Best Val AUC 0.9897 (Epoch 10), 86M parameters</a:t>
-            </a:r>
-          </a:p>
-          <a:p>
-            <a:pPr lvl="1">
-              <a:spcAft>
-                <a:spcPts val="400"/>
-              </a:spcAft>
-            </a:pPr>
-            <a:r>
-              <a:rPr sz="1300" b="0">
-                <a:solidFill>
-                  <a:srgbClr val="000000"/>
-                </a:solidFill>
-              </a:rPr>
-              <a:t>MobileNetV3: Accuracy 91.39%, AUC 0.9982, Best Val AUC 0.9993 (Epoch 10), 5.4M parameters</a:t>
-            </a:r>
-          </a:p>
-          <a:p>
-            <a:pPr lvl="1">
-              <a:spcAft>
-                <a:spcPts val="400"/>
-              </a:spcAft>
-            </a:pPr>
-            <a:r>
-              <a:rPr sz="1300" b="0">
-                <a:solidFill>
-                  <a:srgbClr val="000000"/>
-                </a:solidFill>
-              </a:rPr>
-              <a:t>VGG16: Accuracy 83.20%, AUC 0.9247, Best Val AUC 0.9343 (Epoch 10), 138M parameters</a:t>
+              <a:t>Developed using React 18, TypeScript, Tailwind CSS, shadcn/ui and VTK.js for interactive 3D volume rendering and responsive medical workflow navigation.</a:t>
             </a:r>
           </a:p>
         </p:txBody>
@@ -6215,7 +6070,7 @@
           <p:cNvPr id="4" name="object 2">
             <a:extLst>
               <a:ext uri="{FF2B5EF4-FFF2-40B4-BE49-F238E27FC236}">
-                <a16:creationId xmlns:a16="http://schemas.microsoft.com/office/drawing/2014/main" id="{E386D544-A80A-B599-44C7-B40BA6ECC63C}"/>
+                <a16:creationId xmlns:a16="http://schemas.microsoft.com/office/drawing/2014/main" id="{B27DA514-48FC-4BF4-8205-DE21D456C5FF}"/>
               </a:ext>
             </a:extLst>
           </p:cNvPr>
@@ -6254,7 +6109,7 @@
                 <a:latin typeface="Times New Roman" panose="02020603050405020304" pitchFamily="18" charset="0"/>
                 <a:cs typeface="Times New Roman" panose="02020603050405020304" pitchFamily="18" charset="0"/>
               </a:rPr>
-              <a:t>Experiments and Results</a:t>
+              <a:t>Modules (Contd.)</a:t>
             </a:r>
             <a:endParaRPr sz="3000" b="1" dirty="0">
               <a:latin typeface="Times New Roman" panose="02020603050405020304" pitchFamily="18" charset="0"/>
@@ -6268,7 +6123,7 @@
           <p:cNvPr id="2" name="Date Placeholder 1">
             <a:extLst>
               <a:ext uri="{FF2B5EF4-FFF2-40B4-BE49-F238E27FC236}">
-                <a16:creationId xmlns:a16="http://schemas.microsoft.com/office/drawing/2014/main" id="{5D376B32-FA12-4961-0DBF-EE57A7705BF9}"/>
+                <a16:creationId xmlns:a16="http://schemas.microsoft.com/office/drawing/2014/main" id="{D74A04E0-6631-130F-A154-C85D978EA39B}"/>
               </a:ext>
             </a:extLst>
           </p:cNvPr>
@@ -6303,7 +6158,7 @@
           <p:cNvPr id="5" name="Footer Placeholder 4">
             <a:extLst>
               <a:ext uri="{FF2B5EF4-FFF2-40B4-BE49-F238E27FC236}">
-                <a16:creationId xmlns:a16="http://schemas.microsoft.com/office/drawing/2014/main" id="{8B0EF323-27AB-5372-4287-A24CA541146A}"/>
+                <a16:creationId xmlns:a16="http://schemas.microsoft.com/office/drawing/2014/main" id="{39615995-EDEB-C984-B852-1229C23B1A05}"/>
               </a:ext>
             </a:extLst>
           </p:cNvPr>
@@ -6334,7 +6189,7 @@
           <p:cNvPr id="6" name="Slide Number Placeholder 5">
             <a:extLst>
               <a:ext uri="{FF2B5EF4-FFF2-40B4-BE49-F238E27FC236}">
-                <a16:creationId xmlns:a16="http://schemas.microsoft.com/office/drawing/2014/main" id="{76AAAC16-1233-230F-5D3B-645E6B2832A4}"/>
+                <a16:creationId xmlns:a16="http://schemas.microsoft.com/office/drawing/2014/main" id="{067F5109-389C-3E37-E553-A559233EFD96}"/>
               </a:ext>
             </a:extLst>
           </p:cNvPr>
@@ -6355,7 +6210,7 @@
                 <a:latin typeface="Times New Roman" panose="02020603050405020304" pitchFamily="18" charset="0"/>
                 <a:cs typeface="Times New Roman" panose="02020603050405020304" pitchFamily="18" charset="0"/>
               </a:rPr>
-              <a:t>17</a:t>
+              <a:t>16</a:t>
             </a:fld>
             <a:endParaRPr lang="en-IN" dirty="0">
               <a:latin typeface="Times New Roman" panose="02020603050405020304" pitchFamily="18" charset="0"/>
@@ -6367,7 +6222,7 @@
     </p:spTree>
     <p:extLst>
       <p:ext uri="{BB962C8B-B14F-4D97-AF65-F5344CB8AC3E}">
-        <p14:creationId xmlns:p14="http://schemas.microsoft.com/office/powerpoint/2010/main" val="3666188800"/>
+        <p14:creationId xmlns:p14="http://schemas.microsoft.com/office/powerpoint/2010/main" val="3799870327"/>
       </p:ext>
     </p:extLst>
   </p:cSld>
@@ -6385,7 +6240,7 @@
         <p:cNvPr id="1" name="">
           <a:extLst>
             <a:ext uri="{FF2B5EF4-FFF2-40B4-BE49-F238E27FC236}">
-              <a16:creationId xmlns:a16="http://schemas.microsoft.com/office/drawing/2014/main" id="{121556E8-0003-02C5-D37D-A5CC4CE44D5B}"/>
+              <a16:creationId xmlns:a16="http://schemas.microsoft.com/office/drawing/2014/main" id="{08D49C0F-2490-21B4-8186-6F75540ACED9}"/>
             </a:ext>
           </a:extLst>
         </p:cNvPr>
@@ -6402,139 +6257,10 @@
       </p:grpSpPr>
       <p:sp>
         <p:nvSpPr>
-          <p:cNvPr id="3" name="Content Placeholder 2">
-            <a:extLst>
-              <a:ext uri="{FF2B5EF4-FFF2-40B4-BE49-F238E27FC236}">
-                <a16:creationId xmlns:a16="http://schemas.microsoft.com/office/drawing/2014/main" id="{DFB67973-736B-B05D-D378-DA7CBE3EBDAD}"/>
-              </a:ext>
-            </a:extLst>
-          </p:cNvPr>
-          <p:cNvSpPr>
-            <a:spLocks noGrp="1"/>
-          </p:cNvSpPr>
-          <p:nvPr>
-            <p:ph idx="1"/>
-          </p:nvPr>
-        </p:nvSpPr>
-        <p:spPr/>
-        <p:txBody>
-          <a:bodyPr wrap="square">
-            <a:normAutofit/>
-          </a:bodyPr>
-          <a:lstStyle/>
-          <a:p>
-            <a:pPr>
-              <a:spcAft>
-                <a:spcPts val="800"/>
-              </a:spcAft>
-            </a:pPr>
-            <a:r>
-              <a:rPr sz="1500" b="1">
-                <a:solidFill>
-                  <a:srgbClr val="000000"/>
-                </a:solidFill>
-              </a:rPr>
-              <a:t>2D Multiclass Subtype Classification (4,705 deduplicated images; 706 test samples)</a:t>
-            </a:r>
-          </a:p>
-          <a:p>
-            <a:pPr lvl="1">
-              <a:spcAft>
-                <a:spcPts val="800"/>
-              </a:spcAft>
-            </a:pPr>
-            <a:r>
-              <a:rPr sz="1400" b="0">
-                <a:solidFill>
-                  <a:srgbClr val="000000"/>
-                </a:solidFill>
-              </a:rPr>
-              <a:t>InceptionV3: Accuracy 98.58%, Loss 0.0389, AUC 0.9995, 27.2M parameters</a:t>
-            </a:r>
-          </a:p>
-          <a:p>
-            <a:pPr lvl="1">
-              <a:spcAft>
-                <a:spcPts val="800"/>
-              </a:spcAft>
-            </a:pPr>
-            <a:r>
-              <a:rPr sz="1400" b="0">
-                <a:solidFill>
-                  <a:srgbClr val="000000"/>
-                </a:solidFill>
-              </a:rPr>
-              <a:t>Swin Base: Accuracy 98.58%, Loss 0.0377, AUC 0.9993, 86.7M parameters</a:t>
-            </a:r>
-          </a:p>
-          <a:p>
-            <a:pPr lvl="1">
-              <a:spcAft>
-                <a:spcPts val="800"/>
-              </a:spcAft>
-            </a:pPr>
-            <a:r>
-              <a:rPr sz="1400" b="0">
-                <a:solidFill>
-                  <a:srgbClr val="000000"/>
-                </a:solidFill>
-              </a:rPr>
-              <a:t>EfficientNetB0: Accuracy 97.59%, Loss 0.0582, AUC 0.9987, 5.3M parameters (highest accuracy/parameter ratio: 0.188%/M)</a:t>
-            </a:r>
-          </a:p>
-          <a:p>
-            <a:pPr lvl="1">
-              <a:spcAft>
-                <a:spcPts val="800"/>
-              </a:spcAft>
-            </a:pPr>
-            <a:r>
-              <a:rPr sz="1400" b="0">
-                <a:solidFill>
-                  <a:srgbClr val="000000"/>
-                </a:solidFill>
-              </a:rPr>
-              <a:t>CoaTNet-0: Accuracy 97.59%, Loss 0.0638, AUC 0.9990, ~10M parameters</a:t>
-            </a:r>
-          </a:p>
-          <a:p>
-            <a:pPr lvl="1">
-              <a:spcAft>
-                <a:spcPts val="800"/>
-              </a:spcAft>
-            </a:pPr>
-            <a:r>
-              <a:rPr sz="1400" b="0">
-                <a:solidFill>
-                  <a:srgbClr val="000000"/>
-                </a:solidFill>
-              </a:rPr>
-              <a:t>ResNet50: Accuracy 96.60%, Loss 0.0740, AUC 0.9990, 25.6M parameters</a:t>
-            </a:r>
-          </a:p>
-          <a:p>
-            <a:pPr lvl="1">
-              <a:spcAft>
-                <a:spcPts val="800"/>
-              </a:spcAft>
-            </a:pPr>
-            <a:r>
-              <a:rPr sz="1400" b="0">
-                <a:solidFill>
-                  <a:srgbClr val="000000"/>
-                </a:solidFill>
-              </a:rPr>
-              <a:t>ViT-B/16: Accuracy 89.52%, Loss 0.2737, AUC 0.9736, 86.4M parameters</a:t>
-            </a:r>
-          </a:p>
-        </p:txBody>
-      </p:sp>
-      <p:sp>
-        <p:nvSpPr>
           <p:cNvPr id="4" name="object 2">
             <a:extLst>
               <a:ext uri="{FF2B5EF4-FFF2-40B4-BE49-F238E27FC236}">
-                <a16:creationId xmlns:a16="http://schemas.microsoft.com/office/drawing/2014/main" id="{E386D544-A80A-B599-44C7-B40BA6ECC63C}"/>
+                <a16:creationId xmlns:a16="http://schemas.microsoft.com/office/drawing/2014/main" id="{5DE9EA00-8D77-8DC9-1AE3-8B6FD1AF6BCC}"/>
               </a:ext>
             </a:extLst>
           </p:cNvPr>
@@ -6573,7 +6299,7 @@
                 <a:latin typeface="Times New Roman" panose="02020603050405020304" pitchFamily="18" charset="0"/>
                 <a:cs typeface="Times New Roman" panose="02020603050405020304" pitchFamily="18" charset="0"/>
               </a:rPr>
-              <a:t>Experiments and Results (Contd.)</a:t>
+              <a:t>Dataset and Preprocessing</a:t>
             </a:r>
             <a:endParaRPr sz="3000" b="1" dirty="0">
               <a:latin typeface="Times New Roman" panose="02020603050405020304" pitchFamily="18" charset="0"/>
@@ -6587,7 +6313,7 @@
           <p:cNvPr id="2" name="Date Placeholder 1">
             <a:extLst>
               <a:ext uri="{FF2B5EF4-FFF2-40B4-BE49-F238E27FC236}">
-                <a16:creationId xmlns:a16="http://schemas.microsoft.com/office/drawing/2014/main" id="{5D376B32-FA12-4961-0DBF-EE57A7705BF9}"/>
+                <a16:creationId xmlns:a16="http://schemas.microsoft.com/office/drawing/2014/main" id="{3B40592E-46EE-B4F2-7D01-D3568C2F685A}"/>
               </a:ext>
             </a:extLst>
           </p:cNvPr>
@@ -6622,7 +6348,7 @@
           <p:cNvPr id="5" name="Footer Placeholder 4">
             <a:extLst>
               <a:ext uri="{FF2B5EF4-FFF2-40B4-BE49-F238E27FC236}">
-                <a16:creationId xmlns:a16="http://schemas.microsoft.com/office/drawing/2014/main" id="{8B0EF323-27AB-5372-4287-A24CA541146A}"/>
+                <a16:creationId xmlns:a16="http://schemas.microsoft.com/office/drawing/2014/main" id="{5BCDC439-5940-84EE-247A-E3018795A431}"/>
               </a:ext>
             </a:extLst>
           </p:cNvPr>
@@ -6653,7 +6379,7 @@
           <p:cNvPr id="6" name="Slide Number Placeholder 5">
             <a:extLst>
               <a:ext uri="{FF2B5EF4-FFF2-40B4-BE49-F238E27FC236}">
-                <a16:creationId xmlns:a16="http://schemas.microsoft.com/office/drawing/2014/main" id="{76AAAC16-1233-230F-5D3B-645E6B2832A4}"/>
+                <a16:creationId xmlns:a16="http://schemas.microsoft.com/office/drawing/2014/main" id="{A6CB23C8-7091-8CFB-BF2C-3A19CCA810FF}"/>
               </a:ext>
             </a:extLst>
           </p:cNvPr>
@@ -6674,7 +6400,7 @@
                 <a:latin typeface="Times New Roman" panose="02020603050405020304" pitchFamily="18" charset="0"/>
                 <a:cs typeface="Times New Roman" panose="02020603050405020304" pitchFamily="18" charset="0"/>
               </a:rPr>
-              <a:t>18</a:t>
+              <a:t>12</a:t>
             </a:fld>
             <a:endParaRPr lang="en-IN" dirty="0">
               <a:latin typeface="Times New Roman" panose="02020603050405020304" pitchFamily="18" charset="0"/>
@@ -6683,10 +6409,300 @@
           </a:p>
         </p:txBody>
       </p:sp>
+      <p:pic>
+        <p:nvPicPr>
+          <p:cNvPr id="7" name="Picture 6" descr="classification_sample_mri_by_tumour_type.png"/>
+          <p:cNvPicPr>
+            <a:picLocks noChangeAspect="1"/>
+          </p:cNvPicPr>
+          <p:nvPr/>
+        </p:nvPicPr>
+        <p:blipFill>
+          <a:blip r:embed="rId2"/>
+          <a:stretch>
+            <a:fillRect/>
+          </a:stretch>
+        </p:blipFill>
+        <p:spPr>
+          <a:xfrm>
+            <a:off x="411480" y="1591745"/>
+            <a:ext cx="3657600" cy="2394348"/>
+          </a:xfrm>
+          <a:prstGeom prst="rect">
+            <a:avLst/>
+          </a:prstGeom>
+        </p:spPr>
+      </p:pic>
+      <p:sp>
+        <p:nvSpPr>
+          <p:cNvPr id="8" name="TextBox 7"/>
+          <p:cNvSpPr txBox="1"/>
+          <p:nvPr/>
+        </p:nvSpPr>
+        <p:spPr>
+          <a:xfrm>
+            <a:off x="411480" y="4297680"/>
+            <a:ext cx="3657600" cy="310896"/>
+          </a:xfrm>
+          <a:prstGeom prst="rect">
+            <a:avLst/>
+          </a:prstGeom>
+          <a:noFill/>
+        </p:spPr>
+        <p:txBody>
+          <a:bodyPr wrap="square">
+            <a:spAutoFit/>
+          </a:bodyPr>
+          <a:lstStyle/>
+          <a:p>
+            <a:pPr algn="ctr"/>
+            <a:r>
+              <a:rPr sz="1100" b="1">
+                <a:solidFill>
+                  <a:srgbClr val="1F3864"/>
+                </a:solidFill>
+              </a:rPr>
+              <a:t>Sample MRI scans by tumour type</a:t>
+            </a:r>
+          </a:p>
+        </p:txBody>
+      </p:sp>
+      <p:pic>
+        <p:nvPicPr>
+          <p:cNvPr id="9" name="Picture 8" descr="classification_class_distribution_after_deduplication.png"/>
+          <p:cNvPicPr>
+            <a:picLocks noChangeAspect="1"/>
+          </p:cNvPicPr>
+          <p:nvPr/>
+        </p:nvPicPr>
+        <p:blipFill>
+          <a:blip r:embed="rId3"/>
+          <a:stretch>
+            <a:fillRect/>
+          </a:stretch>
+        </p:blipFill>
+        <p:spPr>
+          <a:xfrm>
+            <a:off x="4251960" y="1578745"/>
+            <a:ext cx="3657600" cy="2420348"/>
+          </a:xfrm>
+          <a:prstGeom prst="rect">
+            <a:avLst/>
+          </a:prstGeom>
+        </p:spPr>
+      </p:pic>
+      <p:sp>
+        <p:nvSpPr>
+          <p:cNvPr id="10" name="TextBox 9"/>
+          <p:cNvSpPr txBox="1"/>
+          <p:nvPr/>
+        </p:nvSpPr>
+        <p:spPr>
+          <a:xfrm>
+            <a:off x="4251960" y="4297680"/>
+            <a:ext cx="3657600" cy="310896"/>
+          </a:xfrm>
+          <a:prstGeom prst="rect">
+            <a:avLst/>
+          </a:prstGeom>
+          <a:noFill/>
+        </p:spPr>
+        <p:txBody>
+          <a:bodyPr wrap="square">
+            <a:spAutoFit/>
+          </a:bodyPr>
+          <a:lstStyle/>
+          <a:p>
+            <a:pPr algn="ctr"/>
+            <a:r>
+              <a:rPr sz="1100" b="1">
+                <a:solidFill>
+                  <a:srgbClr val="1F3864"/>
+                </a:solidFill>
+              </a:rPr>
+              <a:t>Class distribution after pHash deduplication</a:t>
+            </a:r>
+          </a:p>
+        </p:txBody>
+      </p:sp>
+      <p:pic>
+        <p:nvPicPr>
+          <p:cNvPr id="11" name="Picture 10" descr="classification_dataset_size_comparison_deduplication.png"/>
+          <p:cNvPicPr>
+            <a:picLocks noChangeAspect="1"/>
+          </p:cNvPicPr>
+          <p:nvPr/>
+        </p:nvPicPr>
+        <p:blipFill>
+          <a:blip r:embed="rId4"/>
+          <a:stretch>
+            <a:fillRect/>
+          </a:stretch>
+        </p:blipFill>
+        <p:spPr>
+          <a:xfrm>
+            <a:off x="8092440" y="1548141"/>
+            <a:ext cx="3657600" cy="2481557"/>
+          </a:xfrm>
+          <a:prstGeom prst="rect">
+            <a:avLst/>
+          </a:prstGeom>
+        </p:spPr>
+      </p:pic>
+      <p:sp>
+        <p:nvSpPr>
+          <p:cNvPr id="12" name="TextBox 11"/>
+          <p:cNvSpPr txBox="1"/>
+          <p:nvPr/>
+        </p:nvSpPr>
+        <p:spPr>
+          <a:xfrm>
+            <a:off x="8092440" y="4297680"/>
+            <a:ext cx="3657600" cy="310896"/>
+          </a:xfrm>
+          <a:prstGeom prst="rect">
+            <a:avLst/>
+          </a:prstGeom>
+          <a:noFill/>
+        </p:spPr>
+        <p:txBody>
+          <a:bodyPr wrap="square">
+            <a:spAutoFit/>
+          </a:bodyPr>
+          <a:lstStyle/>
+          <a:p>
+            <a:pPr algn="ctr"/>
+            <a:r>
+              <a:rPr sz="1100" b="1">
+                <a:solidFill>
+                  <a:srgbClr val="1F3864"/>
+                </a:solidFill>
+              </a:rPr>
+              <a:t>Dataset size before and after deduplication (19.3% removed)</a:t>
+            </a:r>
+          </a:p>
+        </p:txBody>
+      </p:sp>
+      <p:pic>
+        <p:nvPicPr>
+          <p:cNvPr id="13" name="Picture 12" descr="detection_mri_image_augmentation_comparison.png"/>
+          <p:cNvPicPr>
+            <a:picLocks noChangeAspect="1"/>
+          </p:cNvPicPr>
+          <p:nvPr/>
+        </p:nvPicPr>
+        <p:blipFill>
+          <a:blip r:embed="rId5"/>
+          <a:stretch>
+            <a:fillRect/>
+          </a:stretch>
+        </p:blipFill>
+        <p:spPr>
+          <a:xfrm>
+            <a:off x="2226875" y="4709160"/>
+            <a:ext cx="2678569" cy="1371600"/>
+          </a:xfrm>
+          <a:prstGeom prst="rect">
+            <a:avLst/>
+          </a:prstGeom>
+        </p:spPr>
+      </p:pic>
+      <p:sp>
+        <p:nvSpPr>
+          <p:cNvPr id="14" name="TextBox 13"/>
+          <p:cNvSpPr txBox="1"/>
+          <p:nvPr/>
+        </p:nvSpPr>
+        <p:spPr>
+          <a:xfrm>
+            <a:off x="1188720" y="6108192"/>
+            <a:ext cx="4754880" cy="310896"/>
+          </a:xfrm>
+          <a:prstGeom prst="rect">
+            <a:avLst/>
+          </a:prstGeom>
+          <a:noFill/>
+        </p:spPr>
+        <p:txBody>
+          <a:bodyPr wrap="square">
+            <a:spAutoFit/>
+          </a:bodyPr>
+          <a:lstStyle/>
+          <a:p>
+            <a:pPr algn="ctr"/>
+            <a:r>
+              <a:rPr sz="1100" b="1">
+                <a:solidFill>
+                  <a:srgbClr val="1F3864"/>
+                </a:solidFill>
+              </a:rPr>
+              <a:t>Training-time augmentation samples</a:t>
+            </a:r>
+          </a:p>
+        </p:txBody>
+      </p:sp>
+      <p:pic>
+        <p:nvPicPr>
+          <p:cNvPr id="15" name="Picture 14" descr="classification_dataset_split_distribution.png"/>
+          <p:cNvPicPr>
+            <a:picLocks noChangeAspect="1"/>
+          </p:cNvPicPr>
+          <p:nvPr/>
+        </p:nvPicPr>
+        <p:blipFill>
+          <a:blip r:embed="rId6"/>
+          <a:stretch>
+            <a:fillRect/>
+          </a:stretch>
+        </p:blipFill>
+        <p:spPr>
+          <a:xfrm>
+            <a:off x="7593055" y="4709160"/>
+            <a:ext cx="1821729" cy="1371600"/>
+          </a:xfrm>
+          <a:prstGeom prst="rect">
+            <a:avLst/>
+          </a:prstGeom>
+        </p:spPr>
+      </p:pic>
+      <p:sp>
+        <p:nvSpPr>
+          <p:cNvPr id="16" name="TextBox 15"/>
+          <p:cNvSpPr txBox="1"/>
+          <p:nvPr/>
+        </p:nvSpPr>
+        <p:spPr>
+          <a:xfrm>
+            <a:off x="6492240" y="6108192"/>
+            <a:ext cx="4023360" cy="310896"/>
+          </a:xfrm>
+          <a:prstGeom prst="rect">
+            <a:avLst/>
+          </a:prstGeom>
+          <a:noFill/>
+        </p:spPr>
+        <p:txBody>
+          <a:bodyPr wrap="square">
+            <a:spAutoFit/>
+          </a:bodyPr>
+          <a:lstStyle/>
+          <a:p>
+            <a:pPr algn="ctr"/>
+            <a:r>
+              <a:rPr sz="1100" b="1">
+                <a:solidFill>
+                  <a:srgbClr val="1F3864"/>
+                </a:solidFill>
+              </a:rPr>
+              <a:t>Stratified 70/15/15 train-validation-test split</a:t>
+            </a:r>
+          </a:p>
+        </p:txBody>
+      </p:sp>
     </p:spTree>
     <p:extLst>
       <p:ext uri="{BB962C8B-B14F-4D97-AF65-F5344CB8AC3E}">
-        <p14:creationId xmlns:p14="http://schemas.microsoft.com/office/powerpoint/2010/main" val="3666188800"/>
+        <p14:creationId xmlns:p14="http://schemas.microsoft.com/office/powerpoint/2010/main" val="63813538"/>
       </p:ext>
     </p:extLst>
   </p:cSld>
@@ -6744,7 +6760,7 @@
           <a:p>
             <a:pPr>
               <a:spcAft>
-                <a:spcPts val="800"/>
+                <a:spcPts val="400"/>
               </a:spcAft>
             </a:pPr>
             <a:r>
@@ -6753,13 +6769,13 @@
                   <a:srgbClr val="000000"/>
                 </a:solidFill>
               </a:rPr>
-              <a:t>3D Volumetric Segmentation on BraTS 2020 (368 cases; 56 test cases)</a:t>
+              <a:t>2D Binary Tumour Detection (3,253 images; 488 test samples)</a:t>
             </a:r>
           </a:p>
           <a:p>
             <a:pPr lvl="1">
               <a:spcAft>
-                <a:spcPts val="800"/>
+                <a:spcPts val="400"/>
               </a:spcAft>
             </a:pPr>
             <a:r>
@@ -6768,13 +6784,13 @@
                   <a:srgbClr val="000000"/>
                 </a:solidFill>
               </a:rPr>
-              <a:t>UNet: WT 0.8647, TC 0.7844, ET 0.7505, Mean Dice 0.7999, Loss 0.4109, 5.6M parameters, 32.4 min (highest verified accuracy)</a:t>
+              <a:t>CoaTNet-0: Accuracy 99.59%, AUC 1.0000, Best Val AUC 0.9999 (Epoch 7), ~10M parameters</a:t>
             </a:r>
           </a:p>
           <a:p>
             <a:pPr lvl="1">
               <a:spcAft>
-                <a:spcPts val="800"/>
+                <a:spcPts val="400"/>
               </a:spcAft>
             </a:pPr>
             <a:r>
@@ -6783,13 +6799,13 @@
                   <a:srgbClr val="000000"/>
                 </a:solidFill>
               </a:rPr>
-              <a:t>nnU-Net: WT 0.8569, TC 0.7813, ET 0.7452, Mean Dice 0.7945, Loss 0.4553, 16.5M parameters, 55.1 min</a:t>
+              <a:t>EfficientNetB0: Accuracy 99.59%, AUC 0.9999, Best Val AUC 0.9999 (Epoch 4), 5.3M parameters (optimal efficiency)</a:t>
             </a:r>
           </a:p>
           <a:p>
             <a:pPr lvl="1">
               <a:spcAft>
-                <a:spcPts val="800"/>
+                <a:spcPts val="400"/>
               </a:spcAft>
             </a:pPr>
             <a:r>
@@ -6798,13 +6814,13 @@
                   <a:srgbClr val="000000"/>
                 </a:solidFill>
               </a:rPr>
-              <a:t>VNet: WT 0.8541, TC 0.7108, ET 0.7316, Mean Dice 0.7655, Loss 0.4880, 1.4M parameters, 16.9 min (best parameter and time efficiency)</a:t>
+              <a:t>InceptionV3: Accuracy 99.39%, AUC 1.0000, Best Val AUC 0.9999 (Epoch 2), 23.9M parameters</a:t>
             </a:r>
           </a:p>
           <a:p>
             <a:pPr lvl="1">
               <a:spcAft>
-                <a:spcPts val="800"/>
+                <a:spcPts val="400"/>
               </a:spcAft>
             </a:pPr>
             <a:r>
@@ -6813,13 +6829,13 @@
                   <a:srgbClr val="000000"/>
                 </a:solidFill>
               </a:rPr>
-              <a:t>UNETR: WT 0.7128, TC 0.6261, ET 0.5314, Mean Dice 0.6234, Loss 1.3411, 137.6M parameters, 117.2 min</a:t>
+              <a:t>ResNet50: Accuracy 99.39%, AUC 0.9999, Best Val AUC 0.9999 (Epoch 6), 25.6M parameters</a:t>
             </a:r>
           </a:p>
           <a:p>
             <a:pPr lvl="1">
               <a:spcAft>
-                <a:spcPts val="800"/>
+                <a:spcPts val="400"/>
               </a:spcAft>
             </a:pPr>
             <a:r>
@@ -6828,30 +6844,67 @@
                   <a:srgbClr val="000000"/>
                 </a:solidFill>
               </a:rPr>
-              <a:t>TransBTS: WT 0.6383, TC 0.4618, ET 0.4325, Mean Dice 0.5109, Loss 2.1940, 35.8M parameters, 70.1 min</a:t>
-            </a:r>
-          </a:p>
-          <a:p>
-            <a:pPr>
+              <a:t>DenseNet121: Accuracy 97.95%, AUC 0.9999, Best Val AUC 1.0000 (Epoch 1), 8.0M parameters</a:t>
+            </a:r>
+          </a:p>
+          <a:p>
+            <a:pPr lvl="1">
               <a:spcAft>
-                <a:spcPts val="800"/>
+                <a:spcPts val="400"/>
               </a:spcAft>
             </a:pPr>
             <a:r>
-              <a:rPr sz="1400" b="1">
+              <a:rPr sz="1300" b="0">
                 <a:solidFill>
                   <a:srgbClr val="000000"/>
                 </a:solidFill>
               </a:rPr>
-              <a:t>Statistical Significance: </a:t>
-            </a:r>
-            <a:r>
-              <a:rPr sz="1400" b="0">
+              <a:t>Swin Base: Accuracy 98.16%, AUC 0.9990, Best Val AUC 0.9988 (Epoch 6), 88M parameters</a:t>
+            </a:r>
+          </a:p>
+          <a:p>
+            <a:pPr lvl="1">
+              <a:spcAft>
+                <a:spcPts val="400"/>
+              </a:spcAft>
+            </a:pPr>
+            <a:r>
+              <a:rPr sz="1300" b="0">
                 <a:solidFill>
                   <a:srgbClr val="000000"/>
                 </a:solidFill>
               </a:rPr>
-              <a:t>UNet vs nnU-Net difference 0.0054 (p &gt; 0.05, not significant); UNet vs VNet difference 0.0344 (p &lt; 0.05, significant); the CNN group significantly outperformed transformers (p &lt; 0.001).</a:t>
+              <a:t>ViT-B/16: Accuracy 95.08%, AUC 0.9861, Best Val AUC 0.9897 (Epoch 10), 86M parameters</a:t>
+            </a:r>
+          </a:p>
+          <a:p>
+            <a:pPr lvl="1">
+              <a:spcAft>
+                <a:spcPts val="400"/>
+              </a:spcAft>
+            </a:pPr>
+            <a:r>
+              <a:rPr sz="1300" b="0">
+                <a:solidFill>
+                  <a:srgbClr val="000000"/>
+                </a:solidFill>
+              </a:rPr>
+              <a:t>MobileNetV3: Accuracy 91.39%, AUC 0.9982, Best Val AUC 0.9993 (Epoch 10), 5.4M parameters</a:t>
+            </a:r>
+          </a:p>
+          <a:p>
+            <a:pPr lvl="1">
+              <a:spcAft>
+                <a:spcPts val="400"/>
+              </a:spcAft>
+            </a:pPr>
+            <a:r>
+              <a:rPr sz="1300" b="0">
+                <a:solidFill>
+                  <a:srgbClr val="000000"/>
+                </a:solidFill>
+              </a:rPr>
+              <a:t>VGG16: Accuracy 83.20%, AUC 0.9247, Best Val AUC 0.9343 (Epoch 10), 138M parameters</a:t>
             </a:r>
           </a:p>
         </p:txBody>
@@ -6900,7 +6953,7 @@
                 <a:latin typeface="Times New Roman" panose="02020603050405020304" pitchFamily="18" charset="0"/>
                 <a:cs typeface="Times New Roman" panose="02020603050405020304" pitchFamily="18" charset="0"/>
               </a:rPr>
-              <a:t>Experiments and Results (Contd.)</a:t>
+              <a:t>Experiments and Results</a:t>
             </a:r>
             <a:endParaRPr sz="3000" b="1" dirty="0">
               <a:latin typeface="Times New Roman" panose="02020603050405020304" pitchFamily="18" charset="0"/>
@@ -7001,7 +7054,7 @@
                 <a:latin typeface="Times New Roman" panose="02020603050405020304" pitchFamily="18" charset="0"/>
                 <a:cs typeface="Times New Roman" panose="02020603050405020304" pitchFamily="18" charset="0"/>
               </a:rPr>
-              <a:t>19</a:t>
+              <a:t>17</a:t>
             </a:fld>
             <a:endParaRPr lang="en-IN" dirty="0">
               <a:latin typeface="Times New Roman" panose="02020603050405020304" pitchFamily="18" charset="0"/>
@@ -7214,6 +7267,1860 @@
         <p:cNvPr id="1" name="">
           <a:extLst>
             <a:ext uri="{FF2B5EF4-FFF2-40B4-BE49-F238E27FC236}">
+              <a16:creationId xmlns:a16="http://schemas.microsoft.com/office/drawing/2014/main" id="{08D49C0F-2490-21B4-8186-6F75540ACED9}"/>
+            </a:ext>
+          </a:extLst>
+        </p:cNvPr>
+        <p:cNvGrpSpPr/>
+        <p:nvPr/>
+      </p:nvGrpSpPr>
+      <p:grpSpPr>
+        <a:xfrm>
+          <a:off x="0" y="0"/>
+          <a:ext cx="0" cy="0"/>
+          <a:chOff x="0" y="0"/>
+          <a:chExt cx="0" cy="0"/>
+        </a:xfrm>
+      </p:grpSpPr>
+      <p:sp>
+        <p:nvSpPr>
+          <p:cNvPr id="4" name="object 2">
+            <a:extLst>
+              <a:ext uri="{FF2B5EF4-FFF2-40B4-BE49-F238E27FC236}">
+                <a16:creationId xmlns:a16="http://schemas.microsoft.com/office/drawing/2014/main" id="{5DE9EA00-8D77-8DC9-1AE3-8B6FD1AF6BCC}"/>
+              </a:ext>
+            </a:extLst>
+          </p:cNvPr>
+          <p:cNvSpPr txBox="1">
+            <a:spLocks noGrp="1"/>
+          </p:cNvSpPr>
+          <p:nvPr>
+            <p:ph type="title"/>
+          </p:nvPr>
+        </p:nvSpPr>
+        <p:spPr>
+          <a:xfrm>
+            <a:off x="460248" y="681037"/>
+            <a:ext cx="10515600" cy="576696"/>
+          </a:xfrm>
+          <a:prstGeom prst="rect">
+            <a:avLst/>
+          </a:prstGeom>
+        </p:spPr>
+        <p:txBody>
+          <a:bodyPr vert="horz" wrap="square" lIns="0" tIns="113919" rIns="0" bIns="0" rtlCol="0">
+            <a:spAutoFit/>
+          </a:bodyPr>
+          <a:lstStyle/>
+          <a:p>
+            <a:pPr marL="486409">
+              <a:lnSpc>
+                <a:spcPct val="100000"/>
+              </a:lnSpc>
+              <a:spcBef>
+                <a:spcPts val="130"/>
+              </a:spcBef>
+            </a:pPr>
+            <a:r>
+              <a:rPr lang="en-IN" sz="3000" b="1" dirty="0">
+                <a:latin typeface="Times New Roman" panose="02020603050405020304" pitchFamily="18" charset="0"/>
+                <a:cs typeface="Times New Roman" panose="02020603050405020304" pitchFamily="18" charset="0"/>
+              </a:rPr>
+              <a:t>Experiments and Results — Detection Curves</a:t>
+            </a:r>
+            <a:endParaRPr sz="3000" b="1" dirty="0">
+              <a:latin typeface="Times New Roman" panose="02020603050405020304" pitchFamily="18" charset="0"/>
+              <a:cs typeface="Times New Roman" panose="02020603050405020304" pitchFamily="18" charset="0"/>
+            </a:endParaRPr>
+          </a:p>
+        </p:txBody>
+      </p:sp>
+      <p:sp>
+        <p:nvSpPr>
+          <p:cNvPr id="2" name="Date Placeholder 1">
+            <a:extLst>
+              <a:ext uri="{FF2B5EF4-FFF2-40B4-BE49-F238E27FC236}">
+                <a16:creationId xmlns:a16="http://schemas.microsoft.com/office/drawing/2014/main" id="{3B40592E-46EE-B4F2-7D01-D3568C2F685A}"/>
+              </a:ext>
+            </a:extLst>
+          </p:cNvPr>
+          <p:cNvSpPr>
+            <a:spLocks noGrp="1"/>
+          </p:cNvSpPr>
+          <p:nvPr>
+            <p:ph type="dt" sz="half" idx="10"/>
+          </p:nvPr>
+        </p:nvSpPr>
+        <p:spPr/>
+        <p:txBody>
+          <a:bodyPr/>
+          <a:lstStyle/>
+          <a:p>
+            <a:fld id="{FEC21BBC-35C1-4163-B59F-12E882240DC0}" type="datetime1">
+              <a:rPr lang="en-IN" smtClean="0">
+                <a:latin typeface="Times New Roman" panose="02020603050405020304" pitchFamily="18" charset="0"/>
+                <a:cs typeface="Times New Roman" panose="02020603050405020304" pitchFamily="18" charset="0"/>
+              </a:rPr>
+              <a:t>07-09-2026</a:t>
+            </a:fld>
+            <a:endParaRPr lang="en-IN">
+              <a:latin typeface="Times New Roman" panose="02020603050405020304" pitchFamily="18" charset="0"/>
+              <a:cs typeface="Times New Roman" panose="02020603050405020304" pitchFamily="18" charset="0"/>
+            </a:endParaRPr>
+          </a:p>
+        </p:txBody>
+      </p:sp>
+      <p:sp>
+        <p:nvSpPr>
+          <p:cNvPr id="5" name="Footer Placeholder 4">
+            <a:extLst>
+              <a:ext uri="{FF2B5EF4-FFF2-40B4-BE49-F238E27FC236}">
+                <a16:creationId xmlns:a16="http://schemas.microsoft.com/office/drawing/2014/main" id="{5BCDC439-5940-84EE-247A-E3018795A431}"/>
+              </a:ext>
+            </a:extLst>
+          </p:cNvPr>
+          <p:cNvSpPr>
+            <a:spLocks noGrp="1"/>
+          </p:cNvSpPr>
+          <p:nvPr>
+            <p:ph type="ftr" sz="quarter" idx="11"/>
+          </p:nvPr>
+        </p:nvSpPr>
+        <p:spPr/>
+        <p:txBody>
+          <a:bodyPr/>
+          <a:lstStyle/>
+          <a:p>
+            <a:r>
+              <a:rPr lang="en-IN" dirty="0">
+                <a:latin typeface="Times New Roman" panose="02020603050405020304" pitchFamily="18" charset="0"/>
+                <a:cs typeface="Times New Roman" panose="02020603050405020304" pitchFamily="18" charset="0"/>
+              </a:rPr>
+              <a:t>SCOPE</a:t>
+            </a:r>
+          </a:p>
+        </p:txBody>
+      </p:sp>
+      <p:sp>
+        <p:nvSpPr>
+          <p:cNvPr id="6" name="Slide Number Placeholder 5">
+            <a:extLst>
+              <a:ext uri="{FF2B5EF4-FFF2-40B4-BE49-F238E27FC236}">
+                <a16:creationId xmlns:a16="http://schemas.microsoft.com/office/drawing/2014/main" id="{A6CB23C8-7091-8CFB-BF2C-3A19CCA810FF}"/>
+              </a:ext>
+            </a:extLst>
+          </p:cNvPr>
+          <p:cNvSpPr>
+            <a:spLocks noGrp="1"/>
+          </p:cNvSpPr>
+          <p:nvPr>
+            <p:ph type="sldNum" sz="quarter" idx="12"/>
+          </p:nvPr>
+        </p:nvSpPr>
+        <p:spPr/>
+        <p:txBody>
+          <a:bodyPr/>
+          <a:lstStyle/>
+          <a:p>
+            <a:fld id="{65201FD4-9D8D-4491-815B-63C7BF4F0034}" type="slidenum">
+              <a:rPr lang="en-IN" smtClean="0">
+                <a:latin typeface="Times New Roman" panose="02020603050405020304" pitchFamily="18" charset="0"/>
+                <a:cs typeface="Times New Roman" panose="02020603050405020304" pitchFamily="18" charset="0"/>
+              </a:rPr>
+              <a:t>12</a:t>
+            </a:fld>
+            <a:endParaRPr lang="en-IN" dirty="0">
+              <a:latin typeface="Times New Roman" panose="02020603050405020304" pitchFamily="18" charset="0"/>
+              <a:cs typeface="Times New Roman" panose="02020603050405020304" pitchFamily="18" charset="0"/>
+            </a:endParaRPr>
+          </a:p>
+        </p:txBody>
+      </p:sp>
+      <p:pic>
+        <p:nvPicPr>
+          <p:cNvPr id="7" name="Picture 6" descr="detection_model_training_metrics_curves.png"/>
+          <p:cNvPicPr>
+            <a:picLocks noChangeAspect="1"/>
+          </p:cNvPicPr>
+          <p:nvPr/>
+        </p:nvPicPr>
+        <p:blipFill>
+          <a:blip r:embed="rId2"/>
+          <a:stretch>
+            <a:fillRect/>
+          </a:stretch>
+        </p:blipFill>
+        <p:spPr>
+          <a:xfrm>
+            <a:off x="2157822" y="1325880"/>
+            <a:ext cx="7845874" cy="2148840"/>
+          </a:xfrm>
+          <a:prstGeom prst="rect">
+            <a:avLst/>
+          </a:prstGeom>
+        </p:spPr>
+      </p:pic>
+      <p:sp>
+        <p:nvSpPr>
+          <p:cNvPr id="8" name="TextBox 7"/>
+          <p:cNvSpPr txBox="1"/>
+          <p:nvPr/>
+        </p:nvSpPr>
+        <p:spPr>
+          <a:xfrm>
+            <a:off x="411480" y="3520440"/>
+            <a:ext cx="11338560" cy="310896"/>
+          </a:xfrm>
+          <a:prstGeom prst="rect">
+            <a:avLst/>
+          </a:prstGeom>
+          <a:noFill/>
+        </p:spPr>
+        <p:txBody>
+          <a:bodyPr wrap="square">
+            <a:spAutoFit/>
+          </a:bodyPr>
+          <a:lstStyle/>
+          <a:p>
+            <a:pPr algn="ctr"/>
+            <a:r>
+              <a:rPr sz="1100" b="1">
+                <a:solidFill>
+                  <a:srgbClr val="1F3864"/>
+                </a:solidFill>
+              </a:rPr>
+              <a:t>Training and validation metric curves across the nine detection architectures</a:t>
+            </a:r>
+          </a:p>
+        </p:txBody>
+      </p:sp>
+      <p:pic>
+        <p:nvPicPr>
+          <p:cNvPr id="9" name="Picture 8" descr="detection_confusion_matrix_roc_curve.png"/>
+          <p:cNvPicPr>
+            <a:picLocks noChangeAspect="1"/>
+          </p:cNvPicPr>
+          <p:nvPr/>
+        </p:nvPicPr>
+        <p:blipFill>
+          <a:blip r:embed="rId3"/>
+          <a:stretch>
+            <a:fillRect/>
+          </a:stretch>
+        </p:blipFill>
+        <p:spPr>
+          <a:xfrm>
+            <a:off x="1005840" y="3991836"/>
+            <a:ext cx="4937760" cy="1846127"/>
+          </a:xfrm>
+          <a:prstGeom prst="rect">
+            <a:avLst/>
+          </a:prstGeom>
+        </p:spPr>
+      </p:pic>
+      <p:sp>
+        <p:nvSpPr>
+          <p:cNvPr id="10" name="TextBox 9"/>
+          <p:cNvSpPr txBox="1"/>
+          <p:nvPr/>
+        </p:nvSpPr>
+        <p:spPr>
+          <a:xfrm>
+            <a:off x="1005840" y="5989320"/>
+            <a:ext cx="4937760" cy="310896"/>
+          </a:xfrm>
+          <a:prstGeom prst="rect">
+            <a:avLst/>
+          </a:prstGeom>
+          <a:noFill/>
+        </p:spPr>
+        <p:txBody>
+          <a:bodyPr wrap="square">
+            <a:spAutoFit/>
+          </a:bodyPr>
+          <a:lstStyle/>
+          <a:p>
+            <a:pPr algn="ctr"/>
+            <a:r>
+              <a:rPr sz="1100" b="1">
+                <a:solidFill>
+                  <a:srgbClr val="1F3864"/>
+                </a:solidFill>
+              </a:rPr>
+              <a:t>Confusion matrix and ROC curve (EfficientNetB0)</a:t>
+            </a:r>
+          </a:p>
+        </p:txBody>
+      </p:sp>
+      <p:pic>
+        <p:nvPicPr>
+          <p:cNvPr id="11" name="Picture 10" descr="detection_model_prediction_examples.png"/>
+          <p:cNvPicPr>
+            <a:picLocks noChangeAspect="1"/>
+          </p:cNvPicPr>
+          <p:nvPr/>
+        </p:nvPicPr>
+        <p:blipFill>
+          <a:blip r:embed="rId4"/>
+          <a:stretch>
+            <a:fillRect/>
+          </a:stretch>
+        </p:blipFill>
+        <p:spPr>
+          <a:xfrm>
+            <a:off x="6309360" y="4246723"/>
+            <a:ext cx="4937760" cy="1336353"/>
+          </a:xfrm>
+          <a:prstGeom prst="rect">
+            <a:avLst/>
+          </a:prstGeom>
+        </p:spPr>
+      </p:pic>
+      <p:sp>
+        <p:nvSpPr>
+          <p:cNvPr id="12" name="TextBox 11"/>
+          <p:cNvSpPr txBox="1"/>
+          <p:nvPr/>
+        </p:nvSpPr>
+        <p:spPr>
+          <a:xfrm>
+            <a:off x="6309360" y="5989320"/>
+            <a:ext cx="4937760" cy="310896"/>
+          </a:xfrm>
+          <a:prstGeom prst="rect">
+            <a:avLst/>
+          </a:prstGeom>
+          <a:noFill/>
+        </p:spPr>
+        <p:txBody>
+          <a:bodyPr wrap="square">
+            <a:spAutoFit/>
+          </a:bodyPr>
+          <a:lstStyle/>
+          <a:p>
+            <a:pPr algn="ctr"/>
+            <a:r>
+              <a:rPr sz="1100" b="1">
+                <a:solidFill>
+                  <a:srgbClr val="1F3864"/>
+                </a:solidFill>
+              </a:rPr>
+              <a:t>Example predictions on held-out test scans</a:t>
+            </a:r>
+          </a:p>
+        </p:txBody>
+      </p:sp>
+    </p:spTree>
+    <p:extLst>
+      <p:ext uri="{BB962C8B-B14F-4D97-AF65-F5344CB8AC3E}">
+        <p14:creationId xmlns:p14="http://schemas.microsoft.com/office/powerpoint/2010/main" val="63813538"/>
+      </p:ext>
+    </p:extLst>
+  </p:cSld>
+  <p:clrMapOvr>
+    <a:masterClrMapping/>
+  </p:clrMapOvr>
+</p:sld>
+</file>
+
+<file path=ppt/slides/slide21.xml><?xml version="1.0" encoding="utf-8"?>
+<p:sld xmlns:a="http://schemas.openxmlformats.org/drawingml/2006/main" xmlns:r="http://schemas.openxmlformats.org/officeDocument/2006/relationships" xmlns:p="http://schemas.openxmlformats.org/presentationml/2006/main">
+  <p:cSld>
+    <p:spTree>
+      <p:nvGrpSpPr>
+        <p:cNvPr id="1" name="">
+          <a:extLst>
+            <a:ext uri="{FF2B5EF4-FFF2-40B4-BE49-F238E27FC236}">
+              <a16:creationId xmlns:a16="http://schemas.microsoft.com/office/drawing/2014/main" id="{121556E8-0003-02C5-D37D-A5CC4CE44D5B}"/>
+            </a:ext>
+          </a:extLst>
+        </p:cNvPr>
+        <p:cNvGrpSpPr/>
+        <p:nvPr/>
+      </p:nvGrpSpPr>
+      <p:grpSpPr>
+        <a:xfrm>
+          <a:off x="0" y="0"/>
+          <a:ext cx="0" cy="0"/>
+          <a:chOff x="0" y="0"/>
+          <a:chExt cx="0" cy="0"/>
+        </a:xfrm>
+      </p:grpSpPr>
+      <p:sp>
+        <p:nvSpPr>
+          <p:cNvPr id="3" name="Content Placeholder 2">
+            <a:extLst>
+              <a:ext uri="{FF2B5EF4-FFF2-40B4-BE49-F238E27FC236}">
+                <a16:creationId xmlns:a16="http://schemas.microsoft.com/office/drawing/2014/main" id="{DFB67973-736B-B05D-D378-DA7CBE3EBDAD}"/>
+              </a:ext>
+            </a:extLst>
+          </p:cNvPr>
+          <p:cNvSpPr>
+            <a:spLocks noGrp="1"/>
+          </p:cNvSpPr>
+          <p:nvPr>
+            <p:ph idx="1"/>
+          </p:nvPr>
+        </p:nvSpPr>
+        <p:spPr/>
+        <p:txBody>
+          <a:bodyPr wrap="square">
+            <a:normAutofit/>
+          </a:bodyPr>
+          <a:lstStyle/>
+          <a:p>
+            <a:pPr>
+              <a:spcAft>
+                <a:spcPts val="800"/>
+              </a:spcAft>
+            </a:pPr>
+            <a:r>
+              <a:rPr sz="1500" b="1">
+                <a:solidFill>
+                  <a:srgbClr val="000000"/>
+                </a:solidFill>
+              </a:rPr>
+              <a:t>2D Multiclass Subtype Classification (4,705 deduplicated images; 706 test samples)</a:t>
+            </a:r>
+          </a:p>
+          <a:p>
+            <a:pPr lvl="1">
+              <a:spcAft>
+                <a:spcPts val="800"/>
+              </a:spcAft>
+            </a:pPr>
+            <a:r>
+              <a:rPr sz="1400" b="0">
+                <a:solidFill>
+                  <a:srgbClr val="000000"/>
+                </a:solidFill>
+              </a:rPr>
+              <a:t>InceptionV3: Accuracy 98.58%, Loss 0.0389, AUC 0.9995, 27.2M parameters</a:t>
+            </a:r>
+          </a:p>
+          <a:p>
+            <a:pPr lvl="1">
+              <a:spcAft>
+                <a:spcPts val="800"/>
+              </a:spcAft>
+            </a:pPr>
+            <a:r>
+              <a:rPr sz="1400" b="0">
+                <a:solidFill>
+                  <a:srgbClr val="000000"/>
+                </a:solidFill>
+              </a:rPr>
+              <a:t>Swin Base: Accuracy 98.58%, Loss 0.0377, AUC 0.9993, 86.7M parameters</a:t>
+            </a:r>
+          </a:p>
+          <a:p>
+            <a:pPr lvl="1">
+              <a:spcAft>
+                <a:spcPts val="800"/>
+              </a:spcAft>
+            </a:pPr>
+            <a:r>
+              <a:rPr sz="1400" b="0">
+                <a:solidFill>
+                  <a:srgbClr val="000000"/>
+                </a:solidFill>
+              </a:rPr>
+              <a:t>EfficientNetB0: Accuracy 97.59%, Loss 0.0582, AUC 0.9987, 5.3M parameters (highest accuracy/parameter ratio: 0.188%/M)</a:t>
+            </a:r>
+          </a:p>
+          <a:p>
+            <a:pPr lvl="1">
+              <a:spcAft>
+                <a:spcPts val="800"/>
+              </a:spcAft>
+            </a:pPr>
+            <a:r>
+              <a:rPr sz="1400" b="0">
+                <a:solidFill>
+                  <a:srgbClr val="000000"/>
+                </a:solidFill>
+              </a:rPr>
+              <a:t>CoaTNet-0: Accuracy 97.59%, Loss 0.0638, AUC 0.9990, ~10M parameters</a:t>
+            </a:r>
+          </a:p>
+          <a:p>
+            <a:pPr lvl="1">
+              <a:spcAft>
+                <a:spcPts val="800"/>
+              </a:spcAft>
+            </a:pPr>
+            <a:r>
+              <a:rPr sz="1400" b="0">
+                <a:solidFill>
+                  <a:srgbClr val="000000"/>
+                </a:solidFill>
+              </a:rPr>
+              <a:t>ResNet50: Accuracy 96.60%, Loss 0.0740, AUC 0.9990, 25.6M parameters</a:t>
+            </a:r>
+          </a:p>
+          <a:p>
+            <a:pPr lvl="1">
+              <a:spcAft>
+                <a:spcPts val="800"/>
+              </a:spcAft>
+            </a:pPr>
+            <a:r>
+              <a:rPr sz="1400" b="0">
+                <a:solidFill>
+                  <a:srgbClr val="000000"/>
+                </a:solidFill>
+              </a:rPr>
+              <a:t>ViT-B/16: Accuracy 89.52%, Loss 0.2737, AUC 0.9736, 86.4M parameters</a:t>
+            </a:r>
+          </a:p>
+        </p:txBody>
+      </p:sp>
+      <p:sp>
+        <p:nvSpPr>
+          <p:cNvPr id="4" name="object 2">
+            <a:extLst>
+              <a:ext uri="{FF2B5EF4-FFF2-40B4-BE49-F238E27FC236}">
+                <a16:creationId xmlns:a16="http://schemas.microsoft.com/office/drawing/2014/main" id="{E386D544-A80A-B599-44C7-B40BA6ECC63C}"/>
+              </a:ext>
+            </a:extLst>
+          </p:cNvPr>
+          <p:cNvSpPr txBox="1">
+            <a:spLocks noGrp="1"/>
+          </p:cNvSpPr>
+          <p:nvPr>
+            <p:ph type="title"/>
+          </p:nvPr>
+        </p:nvSpPr>
+        <p:spPr>
+          <a:xfrm>
+            <a:off x="460248" y="681037"/>
+            <a:ext cx="10515600" cy="576696"/>
+          </a:xfrm>
+          <a:prstGeom prst="rect">
+            <a:avLst/>
+          </a:prstGeom>
+        </p:spPr>
+        <p:txBody>
+          <a:bodyPr vert="horz" wrap="square" lIns="0" tIns="113919" rIns="0" bIns="0" rtlCol="0">
+            <a:spAutoFit/>
+          </a:bodyPr>
+          <a:lstStyle/>
+          <a:p>
+            <a:pPr marL="486409">
+              <a:lnSpc>
+                <a:spcPct val="100000"/>
+              </a:lnSpc>
+              <a:spcBef>
+                <a:spcPts val="130"/>
+              </a:spcBef>
+            </a:pPr>
+            <a:r>
+              <a:rPr lang="en-IN" sz="3000" b="1" dirty="0">
+                <a:latin typeface="Times New Roman" panose="02020603050405020304" pitchFamily="18" charset="0"/>
+                <a:cs typeface="Times New Roman" panose="02020603050405020304" pitchFamily="18" charset="0"/>
+              </a:rPr>
+              <a:t>Experiments and Results (Contd.)</a:t>
+            </a:r>
+            <a:endParaRPr sz="3000" b="1" dirty="0">
+              <a:latin typeface="Times New Roman" panose="02020603050405020304" pitchFamily="18" charset="0"/>
+              <a:cs typeface="Times New Roman" panose="02020603050405020304" pitchFamily="18" charset="0"/>
+            </a:endParaRPr>
+          </a:p>
+        </p:txBody>
+      </p:sp>
+      <p:sp>
+        <p:nvSpPr>
+          <p:cNvPr id="2" name="Date Placeholder 1">
+            <a:extLst>
+              <a:ext uri="{FF2B5EF4-FFF2-40B4-BE49-F238E27FC236}">
+                <a16:creationId xmlns:a16="http://schemas.microsoft.com/office/drawing/2014/main" id="{5D376B32-FA12-4961-0DBF-EE57A7705BF9}"/>
+              </a:ext>
+            </a:extLst>
+          </p:cNvPr>
+          <p:cNvSpPr>
+            <a:spLocks noGrp="1"/>
+          </p:cNvSpPr>
+          <p:nvPr>
+            <p:ph type="dt" sz="half" idx="10"/>
+          </p:nvPr>
+        </p:nvSpPr>
+        <p:spPr/>
+        <p:txBody>
+          <a:bodyPr/>
+          <a:lstStyle/>
+          <a:p>
+            <a:fld id="{FEC21BBC-35C1-4163-B59F-12E882240DC0}" type="datetime1">
+              <a:rPr lang="en-IN" smtClean="0">
+                <a:latin typeface="Times New Roman" panose="02020603050405020304" pitchFamily="18" charset="0"/>
+                <a:cs typeface="Times New Roman" panose="02020603050405020304" pitchFamily="18" charset="0"/>
+              </a:rPr>
+              <a:t>07-09-2026</a:t>
+            </a:fld>
+            <a:endParaRPr lang="en-IN">
+              <a:latin typeface="Times New Roman" panose="02020603050405020304" pitchFamily="18" charset="0"/>
+              <a:cs typeface="Times New Roman" panose="02020603050405020304" pitchFamily="18" charset="0"/>
+            </a:endParaRPr>
+          </a:p>
+        </p:txBody>
+      </p:sp>
+      <p:sp>
+        <p:nvSpPr>
+          <p:cNvPr id="5" name="Footer Placeholder 4">
+            <a:extLst>
+              <a:ext uri="{FF2B5EF4-FFF2-40B4-BE49-F238E27FC236}">
+                <a16:creationId xmlns:a16="http://schemas.microsoft.com/office/drawing/2014/main" id="{8B0EF323-27AB-5372-4287-A24CA541146A}"/>
+              </a:ext>
+            </a:extLst>
+          </p:cNvPr>
+          <p:cNvSpPr>
+            <a:spLocks noGrp="1"/>
+          </p:cNvSpPr>
+          <p:nvPr>
+            <p:ph type="ftr" sz="quarter" idx="11"/>
+          </p:nvPr>
+        </p:nvSpPr>
+        <p:spPr/>
+        <p:txBody>
+          <a:bodyPr/>
+          <a:lstStyle/>
+          <a:p>
+            <a:r>
+              <a:rPr lang="en-IN" dirty="0">
+                <a:latin typeface="Times New Roman" panose="02020603050405020304" pitchFamily="18" charset="0"/>
+                <a:cs typeface="Times New Roman" panose="02020603050405020304" pitchFamily="18" charset="0"/>
+              </a:rPr>
+              <a:t>SCOPE</a:t>
+            </a:r>
+          </a:p>
+        </p:txBody>
+      </p:sp>
+      <p:sp>
+        <p:nvSpPr>
+          <p:cNvPr id="6" name="Slide Number Placeholder 5">
+            <a:extLst>
+              <a:ext uri="{FF2B5EF4-FFF2-40B4-BE49-F238E27FC236}">
+                <a16:creationId xmlns:a16="http://schemas.microsoft.com/office/drawing/2014/main" id="{76AAAC16-1233-230F-5D3B-645E6B2832A4}"/>
+              </a:ext>
+            </a:extLst>
+          </p:cNvPr>
+          <p:cNvSpPr>
+            <a:spLocks noGrp="1"/>
+          </p:cNvSpPr>
+          <p:nvPr>
+            <p:ph type="sldNum" sz="quarter" idx="12"/>
+          </p:nvPr>
+        </p:nvSpPr>
+        <p:spPr/>
+        <p:txBody>
+          <a:bodyPr/>
+          <a:lstStyle/>
+          <a:p>
+            <a:fld id="{65201FD4-9D8D-4491-815B-63C7BF4F0034}" type="slidenum">
+              <a:rPr lang="en-IN" smtClean="0">
+                <a:latin typeface="Times New Roman" panose="02020603050405020304" pitchFamily="18" charset="0"/>
+                <a:cs typeface="Times New Roman" panose="02020603050405020304" pitchFamily="18" charset="0"/>
+              </a:rPr>
+              <a:t>18</a:t>
+            </a:fld>
+            <a:endParaRPr lang="en-IN" dirty="0">
+              <a:latin typeface="Times New Roman" panose="02020603050405020304" pitchFamily="18" charset="0"/>
+              <a:cs typeface="Times New Roman" panose="02020603050405020304" pitchFamily="18" charset="0"/>
+            </a:endParaRPr>
+          </a:p>
+        </p:txBody>
+      </p:sp>
+    </p:spTree>
+    <p:extLst>
+      <p:ext uri="{BB962C8B-B14F-4D97-AF65-F5344CB8AC3E}">
+        <p14:creationId xmlns:p14="http://schemas.microsoft.com/office/powerpoint/2010/main" val="3666188800"/>
+      </p:ext>
+    </p:extLst>
+  </p:cSld>
+  <p:clrMapOvr>
+    <a:masterClrMapping/>
+  </p:clrMapOvr>
+</p:sld>
+</file>
+
+<file path=ppt/slides/slide22.xml><?xml version="1.0" encoding="utf-8"?>
+<p:sld xmlns:a="http://schemas.openxmlformats.org/drawingml/2006/main" xmlns:r="http://schemas.openxmlformats.org/officeDocument/2006/relationships" xmlns:p="http://schemas.openxmlformats.org/presentationml/2006/main">
+  <p:cSld>
+    <p:spTree>
+      <p:nvGrpSpPr>
+        <p:cNvPr id="1" name="">
+          <a:extLst>
+            <a:ext uri="{FF2B5EF4-FFF2-40B4-BE49-F238E27FC236}">
+              <a16:creationId xmlns:a16="http://schemas.microsoft.com/office/drawing/2014/main" id="{08D49C0F-2490-21B4-8186-6F75540ACED9}"/>
+            </a:ext>
+          </a:extLst>
+        </p:cNvPr>
+        <p:cNvGrpSpPr/>
+        <p:nvPr/>
+      </p:nvGrpSpPr>
+      <p:grpSpPr>
+        <a:xfrm>
+          <a:off x="0" y="0"/>
+          <a:ext cx="0" cy="0"/>
+          <a:chOff x="0" y="0"/>
+          <a:chExt cx="0" cy="0"/>
+        </a:xfrm>
+      </p:grpSpPr>
+      <p:sp>
+        <p:nvSpPr>
+          <p:cNvPr id="4" name="object 2">
+            <a:extLst>
+              <a:ext uri="{FF2B5EF4-FFF2-40B4-BE49-F238E27FC236}">
+                <a16:creationId xmlns:a16="http://schemas.microsoft.com/office/drawing/2014/main" id="{5DE9EA00-8D77-8DC9-1AE3-8B6FD1AF6BCC}"/>
+              </a:ext>
+            </a:extLst>
+          </p:cNvPr>
+          <p:cNvSpPr txBox="1">
+            <a:spLocks noGrp="1"/>
+          </p:cNvSpPr>
+          <p:nvPr>
+            <p:ph type="title"/>
+          </p:nvPr>
+        </p:nvSpPr>
+        <p:spPr>
+          <a:xfrm>
+            <a:off x="460248" y="681037"/>
+            <a:ext cx="10515600" cy="576696"/>
+          </a:xfrm>
+          <a:prstGeom prst="rect">
+            <a:avLst/>
+          </a:prstGeom>
+        </p:spPr>
+        <p:txBody>
+          <a:bodyPr vert="horz" wrap="square" lIns="0" tIns="113919" rIns="0" bIns="0" rtlCol="0">
+            <a:spAutoFit/>
+          </a:bodyPr>
+          <a:lstStyle/>
+          <a:p>
+            <a:pPr marL="486409">
+              <a:lnSpc>
+                <a:spcPct val="100000"/>
+              </a:lnSpc>
+              <a:spcBef>
+                <a:spcPts val="130"/>
+              </a:spcBef>
+            </a:pPr>
+            <a:r>
+              <a:rPr lang="en-IN" sz="3000" b="1" dirty="0">
+                <a:latin typeface="Times New Roman" panose="02020603050405020304" pitchFamily="18" charset="0"/>
+                <a:cs typeface="Times New Roman" panose="02020603050405020304" pitchFamily="18" charset="0"/>
+              </a:rPr>
+              <a:t>Experiments and Results — Classification Curves</a:t>
+            </a:r>
+            <a:endParaRPr sz="3000" b="1" dirty="0">
+              <a:latin typeface="Times New Roman" panose="02020603050405020304" pitchFamily="18" charset="0"/>
+              <a:cs typeface="Times New Roman" panose="02020603050405020304" pitchFamily="18" charset="0"/>
+            </a:endParaRPr>
+          </a:p>
+        </p:txBody>
+      </p:sp>
+      <p:sp>
+        <p:nvSpPr>
+          <p:cNvPr id="2" name="Date Placeholder 1">
+            <a:extLst>
+              <a:ext uri="{FF2B5EF4-FFF2-40B4-BE49-F238E27FC236}">
+                <a16:creationId xmlns:a16="http://schemas.microsoft.com/office/drawing/2014/main" id="{3B40592E-46EE-B4F2-7D01-D3568C2F685A}"/>
+              </a:ext>
+            </a:extLst>
+          </p:cNvPr>
+          <p:cNvSpPr>
+            <a:spLocks noGrp="1"/>
+          </p:cNvSpPr>
+          <p:nvPr>
+            <p:ph type="dt" sz="half" idx="10"/>
+          </p:nvPr>
+        </p:nvSpPr>
+        <p:spPr/>
+        <p:txBody>
+          <a:bodyPr/>
+          <a:lstStyle/>
+          <a:p>
+            <a:fld id="{FEC21BBC-35C1-4163-B59F-12E882240DC0}" type="datetime1">
+              <a:rPr lang="en-IN" smtClean="0">
+                <a:latin typeface="Times New Roman" panose="02020603050405020304" pitchFamily="18" charset="0"/>
+                <a:cs typeface="Times New Roman" panose="02020603050405020304" pitchFamily="18" charset="0"/>
+              </a:rPr>
+              <a:t>07-09-2026</a:t>
+            </a:fld>
+            <a:endParaRPr lang="en-IN">
+              <a:latin typeface="Times New Roman" panose="02020603050405020304" pitchFamily="18" charset="0"/>
+              <a:cs typeface="Times New Roman" panose="02020603050405020304" pitchFamily="18" charset="0"/>
+            </a:endParaRPr>
+          </a:p>
+        </p:txBody>
+      </p:sp>
+      <p:sp>
+        <p:nvSpPr>
+          <p:cNvPr id="5" name="Footer Placeholder 4">
+            <a:extLst>
+              <a:ext uri="{FF2B5EF4-FFF2-40B4-BE49-F238E27FC236}">
+                <a16:creationId xmlns:a16="http://schemas.microsoft.com/office/drawing/2014/main" id="{5BCDC439-5940-84EE-247A-E3018795A431}"/>
+              </a:ext>
+            </a:extLst>
+          </p:cNvPr>
+          <p:cNvSpPr>
+            <a:spLocks noGrp="1"/>
+          </p:cNvSpPr>
+          <p:nvPr>
+            <p:ph type="ftr" sz="quarter" idx="11"/>
+          </p:nvPr>
+        </p:nvSpPr>
+        <p:spPr/>
+        <p:txBody>
+          <a:bodyPr/>
+          <a:lstStyle/>
+          <a:p>
+            <a:r>
+              <a:rPr lang="en-IN" dirty="0">
+                <a:latin typeface="Times New Roman" panose="02020603050405020304" pitchFamily="18" charset="0"/>
+                <a:cs typeface="Times New Roman" panose="02020603050405020304" pitchFamily="18" charset="0"/>
+              </a:rPr>
+              <a:t>SCOPE</a:t>
+            </a:r>
+          </a:p>
+        </p:txBody>
+      </p:sp>
+      <p:sp>
+        <p:nvSpPr>
+          <p:cNvPr id="6" name="Slide Number Placeholder 5">
+            <a:extLst>
+              <a:ext uri="{FF2B5EF4-FFF2-40B4-BE49-F238E27FC236}">
+                <a16:creationId xmlns:a16="http://schemas.microsoft.com/office/drawing/2014/main" id="{A6CB23C8-7091-8CFB-BF2C-3A19CCA810FF}"/>
+              </a:ext>
+            </a:extLst>
+          </p:cNvPr>
+          <p:cNvSpPr>
+            <a:spLocks noGrp="1"/>
+          </p:cNvSpPr>
+          <p:nvPr>
+            <p:ph type="sldNum" sz="quarter" idx="12"/>
+          </p:nvPr>
+        </p:nvSpPr>
+        <p:spPr/>
+        <p:txBody>
+          <a:bodyPr/>
+          <a:lstStyle/>
+          <a:p>
+            <a:fld id="{65201FD4-9D8D-4491-815B-63C7BF4F0034}" type="slidenum">
+              <a:rPr lang="en-IN" smtClean="0">
+                <a:latin typeface="Times New Roman" panose="02020603050405020304" pitchFamily="18" charset="0"/>
+                <a:cs typeface="Times New Roman" panose="02020603050405020304" pitchFamily="18" charset="0"/>
+              </a:rPr>
+              <a:t>12</a:t>
+            </a:fld>
+            <a:endParaRPr lang="en-IN" dirty="0">
+              <a:latin typeface="Times New Roman" panose="02020603050405020304" pitchFamily="18" charset="0"/>
+              <a:cs typeface="Times New Roman" panose="02020603050405020304" pitchFamily="18" charset="0"/>
+            </a:endParaRPr>
+          </a:p>
+        </p:txBody>
+      </p:sp>
+      <p:pic>
+        <p:nvPicPr>
+          <p:cNvPr id="7" name="Picture 6" descr="classification_training_vs_validation_accuracy.png"/>
+          <p:cNvPicPr>
+            <a:picLocks noChangeAspect="1"/>
+          </p:cNvPicPr>
+          <p:nvPr/>
+        </p:nvPicPr>
+        <p:blipFill>
+          <a:blip r:embed="rId2"/>
+          <a:stretch>
+            <a:fillRect/>
+          </a:stretch>
+        </p:blipFill>
+        <p:spPr>
+          <a:xfrm>
+            <a:off x="411480" y="1432880"/>
+            <a:ext cx="3703320" cy="2026279"/>
+          </a:xfrm>
+          <a:prstGeom prst="rect">
+            <a:avLst/>
+          </a:prstGeom>
+        </p:spPr>
+      </p:pic>
+      <p:sp>
+        <p:nvSpPr>
+          <p:cNvPr id="8" name="TextBox 7"/>
+          <p:cNvSpPr txBox="1"/>
+          <p:nvPr/>
+        </p:nvSpPr>
+        <p:spPr>
+          <a:xfrm>
+            <a:off x="411480" y="3611880"/>
+            <a:ext cx="3703320" cy="310896"/>
+          </a:xfrm>
+          <a:prstGeom prst="rect">
+            <a:avLst/>
+          </a:prstGeom>
+          <a:noFill/>
+        </p:spPr>
+        <p:txBody>
+          <a:bodyPr wrap="square">
+            <a:spAutoFit/>
+          </a:bodyPr>
+          <a:lstStyle/>
+          <a:p>
+            <a:pPr algn="ctr"/>
+            <a:r>
+              <a:rPr sz="1100" b="1">
+                <a:solidFill>
+                  <a:srgbClr val="1F3864"/>
+                </a:solidFill>
+              </a:rPr>
+              <a:t>Training vs validation accuracy</a:t>
+            </a:r>
+          </a:p>
+        </p:txBody>
+      </p:sp>
+      <p:pic>
+        <p:nvPicPr>
+          <p:cNvPr id="9" name="Picture 8" descr="classification_training_vs_validation_loss_curves.png"/>
+          <p:cNvPicPr>
+            <a:picLocks noChangeAspect="1"/>
+          </p:cNvPicPr>
+          <p:nvPr/>
+        </p:nvPicPr>
+        <p:blipFill>
+          <a:blip r:embed="rId3"/>
+          <a:stretch>
+            <a:fillRect/>
+          </a:stretch>
+        </p:blipFill>
+        <p:spPr>
+          <a:xfrm>
+            <a:off x="4251960" y="1424294"/>
+            <a:ext cx="3703320" cy="2043451"/>
+          </a:xfrm>
+          <a:prstGeom prst="rect">
+            <a:avLst/>
+          </a:prstGeom>
+        </p:spPr>
+      </p:pic>
+      <p:sp>
+        <p:nvSpPr>
+          <p:cNvPr id="10" name="TextBox 9"/>
+          <p:cNvSpPr txBox="1"/>
+          <p:nvPr/>
+        </p:nvSpPr>
+        <p:spPr>
+          <a:xfrm>
+            <a:off x="4251960" y="3611880"/>
+            <a:ext cx="3703320" cy="310896"/>
+          </a:xfrm>
+          <a:prstGeom prst="rect">
+            <a:avLst/>
+          </a:prstGeom>
+          <a:noFill/>
+        </p:spPr>
+        <p:txBody>
+          <a:bodyPr wrap="square">
+            <a:spAutoFit/>
+          </a:bodyPr>
+          <a:lstStyle/>
+          <a:p>
+            <a:pPr algn="ctr"/>
+            <a:r>
+              <a:rPr sz="1100" b="1">
+                <a:solidFill>
+                  <a:srgbClr val="1F3864"/>
+                </a:solidFill>
+              </a:rPr>
+              <a:t>Training vs validation loss</a:t>
+            </a:r>
+          </a:p>
+        </p:txBody>
+      </p:sp>
+      <p:pic>
+        <p:nvPicPr>
+          <p:cNvPr id="11" name="Picture 10" descr="classification_training_vs_validation_auc_curves.png"/>
+          <p:cNvPicPr>
+            <a:picLocks noChangeAspect="1"/>
+          </p:cNvPicPr>
+          <p:nvPr/>
+        </p:nvPicPr>
+        <p:blipFill>
+          <a:blip r:embed="rId4"/>
+          <a:stretch>
+            <a:fillRect/>
+          </a:stretch>
+        </p:blipFill>
+        <p:spPr>
+          <a:xfrm>
+            <a:off x="8092440" y="1429865"/>
+            <a:ext cx="3703320" cy="2032309"/>
+          </a:xfrm>
+          <a:prstGeom prst="rect">
+            <a:avLst/>
+          </a:prstGeom>
+        </p:spPr>
+      </p:pic>
+      <p:sp>
+        <p:nvSpPr>
+          <p:cNvPr id="12" name="TextBox 11"/>
+          <p:cNvSpPr txBox="1"/>
+          <p:nvPr/>
+        </p:nvSpPr>
+        <p:spPr>
+          <a:xfrm>
+            <a:off x="8092440" y="3611880"/>
+            <a:ext cx="3703320" cy="310896"/>
+          </a:xfrm>
+          <a:prstGeom prst="rect">
+            <a:avLst/>
+          </a:prstGeom>
+          <a:noFill/>
+        </p:spPr>
+        <p:txBody>
+          <a:bodyPr wrap="square">
+            <a:spAutoFit/>
+          </a:bodyPr>
+          <a:lstStyle/>
+          <a:p>
+            <a:pPr algn="ctr"/>
+            <a:r>
+              <a:rPr sz="1100" b="1">
+                <a:solidFill>
+                  <a:srgbClr val="1F3864"/>
+                </a:solidFill>
+              </a:rPr>
+              <a:t>Training vs validation AUC</a:t>
+            </a:r>
+          </a:p>
+        </p:txBody>
+      </p:sp>
+      <p:pic>
+        <p:nvPicPr>
+          <p:cNvPr id="13" name="Picture 12" descr="classification_multiclass_roc_curves.png"/>
+          <p:cNvPicPr>
+            <a:picLocks noChangeAspect="1"/>
+          </p:cNvPicPr>
+          <p:nvPr/>
+        </p:nvPicPr>
+        <p:blipFill>
+          <a:blip r:embed="rId5"/>
+          <a:stretch>
+            <a:fillRect/>
+          </a:stretch>
+        </p:blipFill>
+        <p:spPr>
+          <a:xfrm>
+            <a:off x="2678136" y="3977639"/>
+            <a:ext cx="2553286" cy="2011680"/>
+          </a:xfrm>
+          <a:prstGeom prst="rect">
+            <a:avLst/>
+          </a:prstGeom>
+        </p:spPr>
+      </p:pic>
+      <p:sp>
+        <p:nvSpPr>
+          <p:cNvPr id="14" name="TextBox 13"/>
+          <p:cNvSpPr txBox="1"/>
+          <p:nvPr/>
+        </p:nvSpPr>
+        <p:spPr>
+          <a:xfrm>
+            <a:off x="2103120" y="6035040"/>
+            <a:ext cx="3703320" cy="310896"/>
+          </a:xfrm>
+          <a:prstGeom prst="rect">
+            <a:avLst/>
+          </a:prstGeom>
+          <a:noFill/>
+        </p:spPr>
+        <p:txBody>
+          <a:bodyPr wrap="square">
+            <a:spAutoFit/>
+          </a:bodyPr>
+          <a:lstStyle/>
+          <a:p>
+            <a:pPr algn="ctr"/>
+            <a:r>
+              <a:rPr sz="1100" b="1">
+                <a:solidFill>
+                  <a:srgbClr val="1F3864"/>
+                </a:solidFill>
+              </a:rPr>
+              <a:t>Multiclass ROC curves (AUC &gt; 0.998)</a:t>
+            </a:r>
+          </a:p>
+        </p:txBody>
+      </p:sp>
+      <p:pic>
+        <p:nvPicPr>
+          <p:cNvPr id="15" name="Picture 14" descr="classification_tumour_classification_confusion_matrix.png"/>
+          <p:cNvPicPr>
+            <a:picLocks noChangeAspect="1"/>
+          </p:cNvPicPr>
+          <p:nvPr/>
+        </p:nvPicPr>
+        <p:blipFill>
+          <a:blip r:embed="rId6"/>
+          <a:stretch>
+            <a:fillRect/>
+          </a:stretch>
+        </p:blipFill>
+        <p:spPr>
+          <a:xfrm>
+            <a:off x="7148416" y="3977639"/>
+            <a:ext cx="2208086" cy="2011680"/>
+          </a:xfrm>
+          <a:prstGeom prst="rect">
+            <a:avLst/>
+          </a:prstGeom>
+        </p:spPr>
+      </p:pic>
+      <p:sp>
+        <p:nvSpPr>
+          <p:cNvPr id="16" name="TextBox 15"/>
+          <p:cNvSpPr txBox="1"/>
+          <p:nvPr/>
+        </p:nvSpPr>
+        <p:spPr>
+          <a:xfrm>
+            <a:off x="6400800" y="6035040"/>
+            <a:ext cx="3703320" cy="310896"/>
+          </a:xfrm>
+          <a:prstGeom prst="rect">
+            <a:avLst/>
+          </a:prstGeom>
+          <a:noFill/>
+        </p:spPr>
+        <p:txBody>
+          <a:bodyPr wrap="square">
+            <a:spAutoFit/>
+          </a:bodyPr>
+          <a:lstStyle/>
+          <a:p>
+            <a:pPr algn="ctr"/>
+            <a:r>
+              <a:rPr sz="1100" b="1">
+                <a:solidFill>
+                  <a:srgbClr val="1F3864"/>
+                </a:solidFill>
+              </a:rPr>
+              <a:t>Confusion matrix — Glioma, Meningioma, Pituitary</a:t>
+            </a:r>
+          </a:p>
+        </p:txBody>
+      </p:sp>
+    </p:spTree>
+    <p:extLst>
+      <p:ext uri="{BB962C8B-B14F-4D97-AF65-F5344CB8AC3E}">
+        <p14:creationId xmlns:p14="http://schemas.microsoft.com/office/powerpoint/2010/main" val="63813538"/>
+      </p:ext>
+    </p:extLst>
+  </p:cSld>
+  <p:clrMapOvr>
+    <a:masterClrMapping/>
+  </p:clrMapOvr>
+</p:sld>
+</file>
+
+<file path=ppt/slides/slide23.xml><?xml version="1.0" encoding="utf-8"?>
+<p:sld xmlns:a="http://schemas.openxmlformats.org/drawingml/2006/main" xmlns:r="http://schemas.openxmlformats.org/officeDocument/2006/relationships" xmlns:p="http://schemas.openxmlformats.org/presentationml/2006/main">
+  <p:cSld>
+    <p:spTree>
+      <p:nvGrpSpPr>
+        <p:cNvPr id="1" name="">
+          <a:extLst>
+            <a:ext uri="{FF2B5EF4-FFF2-40B4-BE49-F238E27FC236}">
+              <a16:creationId xmlns:a16="http://schemas.microsoft.com/office/drawing/2014/main" id="{121556E8-0003-02C5-D37D-A5CC4CE44D5B}"/>
+            </a:ext>
+          </a:extLst>
+        </p:cNvPr>
+        <p:cNvGrpSpPr/>
+        <p:nvPr/>
+      </p:nvGrpSpPr>
+      <p:grpSpPr>
+        <a:xfrm>
+          <a:off x="0" y="0"/>
+          <a:ext cx="0" cy="0"/>
+          <a:chOff x="0" y="0"/>
+          <a:chExt cx="0" cy="0"/>
+        </a:xfrm>
+      </p:grpSpPr>
+      <p:sp>
+        <p:nvSpPr>
+          <p:cNvPr id="3" name="Content Placeholder 2">
+            <a:extLst>
+              <a:ext uri="{FF2B5EF4-FFF2-40B4-BE49-F238E27FC236}">
+                <a16:creationId xmlns:a16="http://schemas.microsoft.com/office/drawing/2014/main" id="{DFB67973-736B-B05D-D378-DA7CBE3EBDAD}"/>
+              </a:ext>
+            </a:extLst>
+          </p:cNvPr>
+          <p:cNvSpPr>
+            <a:spLocks noGrp="1"/>
+          </p:cNvSpPr>
+          <p:nvPr>
+            <p:ph idx="1"/>
+          </p:nvPr>
+        </p:nvSpPr>
+        <p:spPr/>
+        <p:txBody>
+          <a:bodyPr wrap="square">
+            <a:normAutofit/>
+          </a:bodyPr>
+          <a:lstStyle/>
+          <a:p>
+            <a:pPr>
+              <a:spcAft>
+                <a:spcPts val="800"/>
+              </a:spcAft>
+            </a:pPr>
+            <a:r>
+              <a:rPr sz="1400" b="1">
+                <a:solidFill>
+                  <a:srgbClr val="000000"/>
+                </a:solidFill>
+              </a:rPr>
+              <a:t>3D Volumetric Segmentation on BraTS 2020 (368 cases; 56 test cases)</a:t>
+            </a:r>
+          </a:p>
+          <a:p>
+            <a:pPr lvl="1">
+              <a:spcAft>
+                <a:spcPts val="800"/>
+              </a:spcAft>
+            </a:pPr>
+            <a:r>
+              <a:rPr sz="1300" b="0">
+                <a:solidFill>
+                  <a:srgbClr val="000000"/>
+                </a:solidFill>
+              </a:rPr>
+              <a:t>UNet: WT 0.8647, TC 0.7844, ET 0.7505, Mean Dice 0.7999, Loss 0.4109, 5.6M parameters, 32.4 min (highest verified accuracy)</a:t>
+            </a:r>
+          </a:p>
+          <a:p>
+            <a:pPr lvl="1">
+              <a:spcAft>
+                <a:spcPts val="800"/>
+              </a:spcAft>
+            </a:pPr>
+            <a:r>
+              <a:rPr sz="1300" b="0">
+                <a:solidFill>
+                  <a:srgbClr val="000000"/>
+                </a:solidFill>
+              </a:rPr>
+              <a:t>nnU-Net: WT 0.8569, TC 0.7813, ET 0.7452, Mean Dice 0.7945, Loss 0.4553, 16.5M parameters, 55.1 min</a:t>
+            </a:r>
+          </a:p>
+          <a:p>
+            <a:pPr lvl="1">
+              <a:spcAft>
+                <a:spcPts val="800"/>
+              </a:spcAft>
+            </a:pPr>
+            <a:r>
+              <a:rPr sz="1300" b="0">
+                <a:solidFill>
+                  <a:srgbClr val="000000"/>
+                </a:solidFill>
+              </a:rPr>
+              <a:t>VNet: WT 0.8541, TC 0.7108, ET 0.7316, Mean Dice 0.7655, Loss 0.4880, 1.4M parameters, 16.9 min (best parameter and time efficiency)</a:t>
+            </a:r>
+          </a:p>
+          <a:p>
+            <a:pPr lvl="1">
+              <a:spcAft>
+                <a:spcPts val="800"/>
+              </a:spcAft>
+            </a:pPr>
+            <a:r>
+              <a:rPr sz="1300" b="0">
+                <a:solidFill>
+                  <a:srgbClr val="000000"/>
+                </a:solidFill>
+              </a:rPr>
+              <a:t>UNETR: WT 0.7128, TC 0.6261, ET 0.5314, Mean Dice 0.6234, Loss 1.3411, 137.6M parameters, 117.2 min</a:t>
+            </a:r>
+          </a:p>
+          <a:p>
+            <a:pPr lvl="1">
+              <a:spcAft>
+                <a:spcPts val="800"/>
+              </a:spcAft>
+            </a:pPr>
+            <a:r>
+              <a:rPr sz="1300" b="0">
+                <a:solidFill>
+                  <a:srgbClr val="000000"/>
+                </a:solidFill>
+              </a:rPr>
+              <a:t>TransBTS: WT 0.6383, TC 0.4618, ET 0.4325, Mean Dice 0.5109, Loss 2.1940, 35.8M parameters, 70.1 min</a:t>
+            </a:r>
+          </a:p>
+          <a:p>
+            <a:pPr>
+              <a:spcAft>
+                <a:spcPts val="800"/>
+              </a:spcAft>
+            </a:pPr>
+            <a:r>
+              <a:rPr sz="1400" b="1">
+                <a:solidFill>
+                  <a:srgbClr val="000000"/>
+                </a:solidFill>
+              </a:rPr>
+              <a:t>Statistical Significance: </a:t>
+            </a:r>
+            <a:r>
+              <a:rPr sz="1400" b="0">
+                <a:solidFill>
+                  <a:srgbClr val="000000"/>
+                </a:solidFill>
+              </a:rPr>
+              <a:t>UNet vs nnU-Net difference 0.0054 (p &gt; 0.05, not significant); UNet vs VNet difference 0.0344 (p &lt; 0.05, significant); the CNN group significantly outperformed transformers (p &lt; 0.001).</a:t>
+            </a:r>
+          </a:p>
+        </p:txBody>
+      </p:sp>
+      <p:sp>
+        <p:nvSpPr>
+          <p:cNvPr id="4" name="object 2">
+            <a:extLst>
+              <a:ext uri="{FF2B5EF4-FFF2-40B4-BE49-F238E27FC236}">
+                <a16:creationId xmlns:a16="http://schemas.microsoft.com/office/drawing/2014/main" id="{E386D544-A80A-B599-44C7-B40BA6ECC63C}"/>
+              </a:ext>
+            </a:extLst>
+          </p:cNvPr>
+          <p:cNvSpPr txBox="1">
+            <a:spLocks noGrp="1"/>
+          </p:cNvSpPr>
+          <p:nvPr>
+            <p:ph type="title"/>
+          </p:nvPr>
+        </p:nvSpPr>
+        <p:spPr>
+          <a:xfrm>
+            <a:off x="460248" y="681037"/>
+            <a:ext cx="10515600" cy="576696"/>
+          </a:xfrm>
+          <a:prstGeom prst="rect">
+            <a:avLst/>
+          </a:prstGeom>
+        </p:spPr>
+        <p:txBody>
+          <a:bodyPr vert="horz" wrap="square" lIns="0" tIns="113919" rIns="0" bIns="0" rtlCol="0">
+            <a:spAutoFit/>
+          </a:bodyPr>
+          <a:lstStyle/>
+          <a:p>
+            <a:pPr marL="486409">
+              <a:lnSpc>
+                <a:spcPct val="100000"/>
+              </a:lnSpc>
+              <a:spcBef>
+                <a:spcPts val="130"/>
+              </a:spcBef>
+            </a:pPr>
+            <a:r>
+              <a:rPr lang="en-IN" sz="3000" b="1" dirty="0">
+                <a:latin typeface="Times New Roman" panose="02020603050405020304" pitchFamily="18" charset="0"/>
+                <a:cs typeface="Times New Roman" panose="02020603050405020304" pitchFamily="18" charset="0"/>
+              </a:rPr>
+              <a:t>Experiments and Results (Contd.)</a:t>
+            </a:r>
+            <a:endParaRPr sz="3000" b="1" dirty="0">
+              <a:latin typeface="Times New Roman" panose="02020603050405020304" pitchFamily="18" charset="0"/>
+              <a:cs typeface="Times New Roman" panose="02020603050405020304" pitchFamily="18" charset="0"/>
+            </a:endParaRPr>
+          </a:p>
+        </p:txBody>
+      </p:sp>
+      <p:sp>
+        <p:nvSpPr>
+          <p:cNvPr id="2" name="Date Placeholder 1">
+            <a:extLst>
+              <a:ext uri="{FF2B5EF4-FFF2-40B4-BE49-F238E27FC236}">
+                <a16:creationId xmlns:a16="http://schemas.microsoft.com/office/drawing/2014/main" id="{5D376B32-FA12-4961-0DBF-EE57A7705BF9}"/>
+              </a:ext>
+            </a:extLst>
+          </p:cNvPr>
+          <p:cNvSpPr>
+            <a:spLocks noGrp="1"/>
+          </p:cNvSpPr>
+          <p:nvPr>
+            <p:ph type="dt" sz="half" idx="10"/>
+          </p:nvPr>
+        </p:nvSpPr>
+        <p:spPr/>
+        <p:txBody>
+          <a:bodyPr/>
+          <a:lstStyle/>
+          <a:p>
+            <a:fld id="{FEC21BBC-35C1-4163-B59F-12E882240DC0}" type="datetime1">
+              <a:rPr lang="en-IN" smtClean="0">
+                <a:latin typeface="Times New Roman" panose="02020603050405020304" pitchFamily="18" charset="0"/>
+                <a:cs typeface="Times New Roman" panose="02020603050405020304" pitchFamily="18" charset="0"/>
+              </a:rPr>
+              <a:t>07-09-2026</a:t>
+            </a:fld>
+            <a:endParaRPr lang="en-IN">
+              <a:latin typeface="Times New Roman" panose="02020603050405020304" pitchFamily="18" charset="0"/>
+              <a:cs typeface="Times New Roman" panose="02020603050405020304" pitchFamily="18" charset="0"/>
+            </a:endParaRPr>
+          </a:p>
+        </p:txBody>
+      </p:sp>
+      <p:sp>
+        <p:nvSpPr>
+          <p:cNvPr id="5" name="Footer Placeholder 4">
+            <a:extLst>
+              <a:ext uri="{FF2B5EF4-FFF2-40B4-BE49-F238E27FC236}">
+                <a16:creationId xmlns:a16="http://schemas.microsoft.com/office/drawing/2014/main" id="{8B0EF323-27AB-5372-4287-A24CA541146A}"/>
+              </a:ext>
+            </a:extLst>
+          </p:cNvPr>
+          <p:cNvSpPr>
+            <a:spLocks noGrp="1"/>
+          </p:cNvSpPr>
+          <p:nvPr>
+            <p:ph type="ftr" sz="quarter" idx="11"/>
+          </p:nvPr>
+        </p:nvSpPr>
+        <p:spPr/>
+        <p:txBody>
+          <a:bodyPr/>
+          <a:lstStyle/>
+          <a:p>
+            <a:r>
+              <a:rPr lang="en-IN" dirty="0">
+                <a:latin typeface="Times New Roman" panose="02020603050405020304" pitchFamily="18" charset="0"/>
+                <a:cs typeface="Times New Roman" panose="02020603050405020304" pitchFamily="18" charset="0"/>
+              </a:rPr>
+              <a:t>SCOPE</a:t>
+            </a:r>
+          </a:p>
+        </p:txBody>
+      </p:sp>
+      <p:sp>
+        <p:nvSpPr>
+          <p:cNvPr id="6" name="Slide Number Placeholder 5">
+            <a:extLst>
+              <a:ext uri="{FF2B5EF4-FFF2-40B4-BE49-F238E27FC236}">
+                <a16:creationId xmlns:a16="http://schemas.microsoft.com/office/drawing/2014/main" id="{76AAAC16-1233-230F-5D3B-645E6B2832A4}"/>
+              </a:ext>
+            </a:extLst>
+          </p:cNvPr>
+          <p:cNvSpPr>
+            <a:spLocks noGrp="1"/>
+          </p:cNvSpPr>
+          <p:nvPr>
+            <p:ph type="sldNum" sz="quarter" idx="12"/>
+          </p:nvPr>
+        </p:nvSpPr>
+        <p:spPr/>
+        <p:txBody>
+          <a:bodyPr/>
+          <a:lstStyle/>
+          <a:p>
+            <a:fld id="{65201FD4-9D8D-4491-815B-63C7BF4F0034}" type="slidenum">
+              <a:rPr lang="en-IN" smtClean="0">
+                <a:latin typeface="Times New Roman" panose="02020603050405020304" pitchFamily="18" charset="0"/>
+                <a:cs typeface="Times New Roman" panose="02020603050405020304" pitchFamily="18" charset="0"/>
+              </a:rPr>
+              <a:t>19</a:t>
+            </a:fld>
+            <a:endParaRPr lang="en-IN" dirty="0">
+              <a:latin typeface="Times New Roman" panose="02020603050405020304" pitchFamily="18" charset="0"/>
+              <a:cs typeface="Times New Roman" panose="02020603050405020304" pitchFamily="18" charset="0"/>
+            </a:endParaRPr>
+          </a:p>
+        </p:txBody>
+      </p:sp>
+    </p:spTree>
+    <p:extLst>
+      <p:ext uri="{BB962C8B-B14F-4D97-AF65-F5344CB8AC3E}">
+        <p14:creationId xmlns:p14="http://schemas.microsoft.com/office/powerpoint/2010/main" val="3666188800"/>
+      </p:ext>
+    </p:extLst>
+  </p:cSld>
+  <p:clrMapOvr>
+    <a:masterClrMapping/>
+  </p:clrMapOvr>
+</p:sld>
+</file>
+
+<file path=ppt/slides/slide24.xml><?xml version="1.0" encoding="utf-8"?>
+<p:sld xmlns:a="http://schemas.openxmlformats.org/drawingml/2006/main" xmlns:r="http://schemas.openxmlformats.org/officeDocument/2006/relationships" xmlns:p="http://schemas.openxmlformats.org/presentationml/2006/main">
+  <p:cSld>
+    <p:spTree>
+      <p:nvGrpSpPr>
+        <p:cNvPr id="1" name="">
+          <a:extLst>
+            <a:ext uri="{FF2B5EF4-FFF2-40B4-BE49-F238E27FC236}">
+              <a16:creationId xmlns:a16="http://schemas.microsoft.com/office/drawing/2014/main" id="{08D49C0F-2490-21B4-8186-6F75540ACED9}"/>
+            </a:ext>
+          </a:extLst>
+        </p:cNvPr>
+        <p:cNvGrpSpPr/>
+        <p:nvPr/>
+      </p:nvGrpSpPr>
+      <p:grpSpPr>
+        <a:xfrm>
+          <a:off x="0" y="0"/>
+          <a:ext cx="0" cy="0"/>
+          <a:chOff x="0" y="0"/>
+          <a:chExt cx="0" cy="0"/>
+        </a:xfrm>
+      </p:grpSpPr>
+      <p:sp>
+        <p:nvSpPr>
+          <p:cNvPr id="4" name="object 2">
+            <a:extLst>
+              <a:ext uri="{FF2B5EF4-FFF2-40B4-BE49-F238E27FC236}">
+                <a16:creationId xmlns:a16="http://schemas.microsoft.com/office/drawing/2014/main" id="{5DE9EA00-8D77-8DC9-1AE3-8B6FD1AF6BCC}"/>
+              </a:ext>
+            </a:extLst>
+          </p:cNvPr>
+          <p:cNvSpPr txBox="1">
+            <a:spLocks noGrp="1"/>
+          </p:cNvSpPr>
+          <p:nvPr>
+            <p:ph type="title"/>
+          </p:nvPr>
+        </p:nvSpPr>
+        <p:spPr>
+          <a:xfrm>
+            <a:off x="460248" y="681037"/>
+            <a:ext cx="10515600" cy="576696"/>
+          </a:xfrm>
+          <a:prstGeom prst="rect">
+            <a:avLst/>
+          </a:prstGeom>
+        </p:spPr>
+        <p:txBody>
+          <a:bodyPr vert="horz" wrap="square" lIns="0" tIns="113919" rIns="0" bIns="0" rtlCol="0">
+            <a:spAutoFit/>
+          </a:bodyPr>
+          <a:lstStyle/>
+          <a:p>
+            <a:pPr marL="486409">
+              <a:lnSpc>
+                <a:spcPct val="100000"/>
+              </a:lnSpc>
+              <a:spcBef>
+                <a:spcPts val="130"/>
+              </a:spcBef>
+            </a:pPr>
+            <a:r>
+              <a:rPr lang="en-IN" sz="3000" b="1" dirty="0">
+                <a:latin typeface="Times New Roman" panose="02020603050405020304" pitchFamily="18" charset="0"/>
+                <a:cs typeface="Times New Roman" panose="02020603050405020304" pitchFamily="18" charset="0"/>
+              </a:rPr>
+              <a:t>Experiments and Results — Segmentation Outputs</a:t>
+            </a:r>
+            <a:endParaRPr sz="3000" b="1" dirty="0">
+              <a:latin typeface="Times New Roman" panose="02020603050405020304" pitchFamily="18" charset="0"/>
+              <a:cs typeface="Times New Roman" panose="02020603050405020304" pitchFamily="18" charset="0"/>
+            </a:endParaRPr>
+          </a:p>
+        </p:txBody>
+      </p:sp>
+      <p:sp>
+        <p:nvSpPr>
+          <p:cNvPr id="2" name="Date Placeholder 1">
+            <a:extLst>
+              <a:ext uri="{FF2B5EF4-FFF2-40B4-BE49-F238E27FC236}">
+                <a16:creationId xmlns:a16="http://schemas.microsoft.com/office/drawing/2014/main" id="{3B40592E-46EE-B4F2-7D01-D3568C2F685A}"/>
+              </a:ext>
+            </a:extLst>
+          </p:cNvPr>
+          <p:cNvSpPr>
+            <a:spLocks noGrp="1"/>
+          </p:cNvSpPr>
+          <p:nvPr>
+            <p:ph type="dt" sz="half" idx="10"/>
+          </p:nvPr>
+        </p:nvSpPr>
+        <p:spPr/>
+        <p:txBody>
+          <a:bodyPr/>
+          <a:lstStyle/>
+          <a:p>
+            <a:fld id="{FEC21BBC-35C1-4163-B59F-12E882240DC0}" type="datetime1">
+              <a:rPr lang="en-IN" smtClean="0">
+                <a:latin typeface="Times New Roman" panose="02020603050405020304" pitchFamily="18" charset="0"/>
+                <a:cs typeface="Times New Roman" panose="02020603050405020304" pitchFamily="18" charset="0"/>
+              </a:rPr>
+              <a:t>07-09-2026</a:t>
+            </a:fld>
+            <a:endParaRPr lang="en-IN">
+              <a:latin typeface="Times New Roman" panose="02020603050405020304" pitchFamily="18" charset="0"/>
+              <a:cs typeface="Times New Roman" panose="02020603050405020304" pitchFamily="18" charset="0"/>
+            </a:endParaRPr>
+          </a:p>
+        </p:txBody>
+      </p:sp>
+      <p:sp>
+        <p:nvSpPr>
+          <p:cNvPr id="5" name="Footer Placeholder 4">
+            <a:extLst>
+              <a:ext uri="{FF2B5EF4-FFF2-40B4-BE49-F238E27FC236}">
+                <a16:creationId xmlns:a16="http://schemas.microsoft.com/office/drawing/2014/main" id="{5BCDC439-5940-84EE-247A-E3018795A431}"/>
+              </a:ext>
+            </a:extLst>
+          </p:cNvPr>
+          <p:cNvSpPr>
+            <a:spLocks noGrp="1"/>
+          </p:cNvSpPr>
+          <p:nvPr>
+            <p:ph type="ftr" sz="quarter" idx="11"/>
+          </p:nvPr>
+        </p:nvSpPr>
+        <p:spPr/>
+        <p:txBody>
+          <a:bodyPr/>
+          <a:lstStyle/>
+          <a:p>
+            <a:r>
+              <a:rPr lang="en-IN" dirty="0">
+                <a:latin typeface="Times New Roman" panose="02020603050405020304" pitchFamily="18" charset="0"/>
+                <a:cs typeface="Times New Roman" panose="02020603050405020304" pitchFamily="18" charset="0"/>
+              </a:rPr>
+              <a:t>SCOPE</a:t>
+            </a:r>
+          </a:p>
+        </p:txBody>
+      </p:sp>
+      <p:sp>
+        <p:nvSpPr>
+          <p:cNvPr id="6" name="Slide Number Placeholder 5">
+            <a:extLst>
+              <a:ext uri="{FF2B5EF4-FFF2-40B4-BE49-F238E27FC236}">
+                <a16:creationId xmlns:a16="http://schemas.microsoft.com/office/drawing/2014/main" id="{A6CB23C8-7091-8CFB-BF2C-3A19CCA810FF}"/>
+              </a:ext>
+            </a:extLst>
+          </p:cNvPr>
+          <p:cNvSpPr>
+            <a:spLocks noGrp="1"/>
+          </p:cNvSpPr>
+          <p:nvPr>
+            <p:ph type="sldNum" sz="quarter" idx="12"/>
+          </p:nvPr>
+        </p:nvSpPr>
+        <p:spPr/>
+        <p:txBody>
+          <a:bodyPr/>
+          <a:lstStyle/>
+          <a:p>
+            <a:fld id="{65201FD4-9D8D-4491-815B-63C7BF4F0034}" type="slidenum">
+              <a:rPr lang="en-IN" smtClean="0">
+                <a:latin typeface="Times New Roman" panose="02020603050405020304" pitchFamily="18" charset="0"/>
+                <a:cs typeface="Times New Roman" panose="02020603050405020304" pitchFamily="18" charset="0"/>
+              </a:rPr>
+              <a:t>12</a:t>
+            </a:fld>
+            <a:endParaRPr lang="en-IN" dirty="0">
+              <a:latin typeface="Times New Roman" panose="02020603050405020304" pitchFamily="18" charset="0"/>
+              <a:cs typeface="Times New Roman" panose="02020603050405020304" pitchFamily="18" charset="0"/>
+            </a:endParaRPr>
+          </a:p>
+        </p:txBody>
+      </p:sp>
+      <p:pic>
+        <p:nvPicPr>
+          <p:cNvPr id="7" name="Picture 6" descr="segmentation_mri_modalities_segmentation_masks.png"/>
+          <p:cNvPicPr>
+            <a:picLocks noChangeAspect="1"/>
+          </p:cNvPicPr>
+          <p:nvPr/>
+        </p:nvPicPr>
+        <p:blipFill>
+          <a:blip r:embed="rId2"/>
+          <a:stretch>
+            <a:fillRect/>
+          </a:stretch>
+        </p:blipFill>
+        <p:spPr>
+          <a:xfrm>
+            <a:off x="932309" y="1325880"/>
+            <a:ext cx="4536180" cy="2331720"/>
+          </a:xfrm>
+          <a:prstGeom prst="rect">
+            <a:avLst/>
+          </a:prstGeom>
+        </p:spPr>
+      </p:pic>
+      <p:sp>
+        <p:nvSpPr>
+          <p:cNvPr id="8" name="TextBox 7"/>
+          <p:cNvSpPr txBox="1"/>
+          <p:nvPr/>
+        </p:nvSpPr>
+        <p:spPr>
+          <a:xfrm>
+            <a:off x="411480" y="3703320"/>
+            <a:ext cx="5577840" cy="310896"/>
+          </a:xfrm>
+          <a:prstGeom prst="rect">
+            <a:avLst/>
+          </a:prstGeom>
+          <a:noFill/>
+        </p:spPr>
+        <p:txBody>
+          <a:bodyPr wrap="square">
+            <a:spAutoFit/>
+          </a:bodyPr>
+          <a:lstStyle/>
+          <a:p>
+            <a:pPr algn="ctr"/>
+            <a:r>
+              <a:rPr sz="1100" b="1">
+                <a:solidFill>
+                  <a:srgbClr val="1F3864"/>
+                </a:solidFill>
+              </a:rPr>
+              <a:t>Multimodal input sequences (T1, T1CE, T2, FLAIR) and reference masks</a:t>
+            </a:r>
+          </a:p>
+        </p:txBody>
+      </p:sp>
+      <p:pic>
+        <p:nvPicPr>
+          <p:cNvPr id="9" name="Picture 8" descr="segmentation_ground_truth_vs_predicted_tumour_segmentation.png"/>
+          <p:cNvPicPr>
+            <a:picLocks noChangeAspect="1"/>
+          </p:cNvPicPr>
+          <p:nvPr/>
+        </p:nvPicPr>
+        <p:blipFill>
+          <a:blip r:embed="rId3"/>
+          <a:stretch>
+            <a:fillRect/>
+          </a:stretch>
+        </p:blipFill>
+        <p:spPr>
+          <a:xfrm>
+            <a:off x="7110522" y="1325880"/>
+            <a:ext cx="3701194" cy="2331720"/>
+          </a:xfrm>
+          <a:prstGeom prst="rect">
+            <a:avLst/>
+          </a:prstGeom>
+        </p:spPr>
+      </p:pic>
+      <p:sp>
+        <p:nvSpPr>
+          <p:cNvPr id="10" name="TextBox 9"/>
+          <p:cNvSpPr txBox="1"/>
+          <p:nvPr/>
+        </p:nvSpPr>
+        <p:spPr>
+          <a:xfrm>
+            <a:off x="6172200" y="3703320"/>
+            <a:ext cx="5577840" cy="310896"/>
+          </a:xfrm>
+          <a:prstGeom prst="rect">
+            <a:avLst/>
+          </a:prstGeom>
+          <a:noFill/>
+        </p:spPr>
+        <p:txBody>
+          <a:bodyPr wrap="square">
+            <a:spAutoFit/>
+          </a:bodyPr>
+          <a:lstStyle/>
+          <a:p>
+            <a:pPr algn="ctr"/>
+            <a:r>
+              <a:rPr sz="1100" b="1">
+                <a:solidFill>
+                  <a:srgbClr val="1F3864"/>
+                </a:solidFill>
+              </a:rPr>
+              <a:t>Ground truth versus predicted tumour segmentation</a:t>
+            </a:r>
+          </a:p>
+        </p:txBody>
+      </p:sp>
+      <p:pic>
+        <p:nvPicPr>
+          <p:cNvPr id="11" name="Picture 10" descr="segmentation_training_loss_dice_score_progression.png"/>
+          <p:cNvPicPr>
+            <a:picLocks noChangeAspect="1"/>
+          </p:cNvPicPr>
+          <p:nvPr/>
+        </p:nvPicPr>
+        <p:blipFill>
+          <a:blip r:embed="rId4"/>
+          <a:stretch>
+            <a:fillRect/>
+          </a:stretch>
+        </p:blipFill>
+        <p:spPr>
+          <a:xfrm>
+            <a:off x="3489592" y="4069080"/>
+            <a:ext cx="5182334" cy="1920240"/>
+          </a:xfrm>
+          <a:prstGeom prst="rect">
+            <a:avLst/>
+          </a:prstGeom>
+        </p:spPr>
+      </p:pic>
+      <p:sp>
+        <p:nvSpPr>
+          <p:cNvPr id="12" name="TextBox 11"/>
+          <p:cNvSpPr txBox="1"/>
+          <p:nvPr/>
+        </p:nvSpPr>
+        <p:spPr>
+          <a:xfrm>
+            <a:off x="2377440" y="6035040"/>
+            <a:ext cx="7406640" cy="310896"/>
+          </a:xfrm>
+          <a:prstGeom prst="rect">
+            <a:avLst/>
+          </a:prstGeom>
+          <a:noFill/>
+        </p:spPr>
+        <p:txBody>
+          <a:bodyPr wrap="square">
+            <a:spAutoFit/>
+          </a:bodyPr>
+          <a:lstStyle/>
+          <a:p>
+            <a:pPr algn="ctr"/>
+            <a:r>
+              <a:rPr sz="1100" b="1">
+                <a:solidFill>
+                  <a:srgbClr val="1F3864"/>
+                </a:solidFill>
+              </a:rPr>
+              <a:t>Training loss and Dice score progression across the 3D architectures</a:t>
+            </a:r>
+          </a:p>
+        </p:txBody>
+      </p:sp>
+    </p:spTree>
+    <p:extLst>
+      <p:ext uri="{BB962C8B-B14F-4D97-AF65-F5344CB8AC3E}">
+        <p14:creationId xmlns:p14="http://schemas.microsoft.com/office/powerpoint/2010/main" val="63813538"/>
+      </p:ext>
+    </p:extLst>
+  </p:cSld>
+  <p:clrMapOvr>
+    <a:masterClrMapping/>
+  </p:clrMapOvr>
+</p:sld>
+</file>
+
+<file path=ppt/slides/slide25.xml><?xml version="1.0" encoding="utf-8"?>
+<p:sld xmlns:a="http://schemas.openxmlformats.org/drawingml/2006/main" xmlns:r="http://schemas.openxmlformats.org/officeDocument/2006/relationships" xmlns:p="http://schemas.openxmlformats.org/presentationml/2006/main">
+  <p:cSld>
+    <p:spTree>
+      <p:nvGrpSpPr>
+        <p:cNvPr id="1" name="">
+          <a:extLst>
+            <a:ext uri="{FF2B5EF4-FFF2-40B4-BE49-F238E27FC236}">
               <a16:creationId xmlns:a16="http://schemas.microsoft.com/office/drawing/2014/main" id="{BCC49A39-F362-DB35-B5DF-7E322AB9CAE0}"/>
             </a:ext>
           </a:extLst>
@@ -7535,7 +9442,7 @@
 </p:sld>
 </file>
 
-<file path=ppt/slides/slide21.xml><?xml version="1.0" encoding="utf-8"?>
+<file path=ppt/slides/slide26.xml><?xml version="1.0" encoding="utf-8"?>
 <p:sld xmlns:a="http://schemas.openxmlformats.org/drawingml/2006/main" xmlns:r="http://schemas.openxmlformats.org/officeDocument/2006/relationships" xmlns:p="http://schemas.openxmlformats.org/presentationml/2006/main">
   <p:cSld>
     <p:spTree>
@@ -7890,7 +9797,7 @@
 </p:sld>
 </file>
 
-<file path=ppt/slides/slide22.xml><?xml version="1.0" encoding="utf-8"?>
+<file path=ppt/slides/slide27.xml><?xml version="1.0" encoding="utf-8"?>
 <p:sld xmlns:a="http://schemas.openxmlformats.org/drawingml/2006/main" xmlns:r="http://schemas.openxmlformats.org/officeDocument/2006/relationships" xmlns:p="http://schemas.openxmlformats.org/presentationml/2006/main">
   <p:cSld>
     <p:spTree>

--- a/Backend/Materials/Review #2.pptx
+++ b/Backend/Materials/Review #2.pptx
@@ -229,7 +229,7 @@
           <a:p>
             <a:fld id="{C058E2E1-8886-43B2-B986-F2B06DAA2FAC}" type="datetimeFigureOut">
               <a:rPr lang="en-IN" smtClean="0"/>
-              <a:t>08-09-2026</a:t>
+              <a:t>09-09-2026</a:t>
             </a:fld>
             <a:endParaRPr lang="en-IN"/>
           </a:p>
@@ -646,7 +646,7 @@
           <a:p>
             <a:fld id="{8F3E78AE-7F97-4550-9DD8-BF69171FDC30}" type="datetime1">
               <a:rPr lang="en-IN" smtClean="0"/>
-              <a:t>08-09-2026</a:t>
+              <a:t>09-09-2026</a:t>
             </a:fld>
             <a:endParaRPr lang="en-IN"/>
           </a:p>
@@ -849,7 +849,7 @@
           <a:p>
             <a:fld id="{5576931C-EA1A-43DD-B3B3-66F5BA587712}" type="datetime1">
               <a:rPr lang="en-IN" smtClean="0"/>
-              <a:t>08-09-2026</a:t>
+              <a:t>09-09-2026</a:t>
             </a:fld>
             <a:endParaRPr lang="en-IN"/>
           </a:p>
@@ -1062,7 +1062,7 @@
           <a:p>
             <a:fld id="{82C9B0E1-7C95-4C20-B9C6-BA51F388E878}" type="datetime1">
               <a:rPr lang="en-IN" smtClean="0"/>
-              <a:t>08-09-2026</a:t>
+              <a:t>09-09-2026</a:t>
             </a:fld>
             <a:endParaRPr lang="en-IN"/>
           </a:p>
@@ -1265,7 +1265,7 @@
           <a:p>
             <a:fld id="{FEA886FF-1BA7-4533-94E6-869CE1E2970B}" type="datetime1">
               <a:rPr lang="en-IN" smtClean="0"/>
-              <a:t>08-09-2026</a:t>
+              <a:t>09-09-2026</a:t>
             </a:fld>
             <a:endParaRPr lang="en-IN"/>
           </a:p>
@@ -1544,7 +1544,7 @@
           <a:p>
             <a:fld id="{93E22BD8-A2C4-424B-809A-C64DDCC305D9}" type="datetime1">
               <a:rPr lang="en-IN" smtClean="0"/>
-              <a:t>08-09-2026</a:t>
+              <a:t>09-09-2026</a:t>
             </a:fld>
             <a:endParaRPr lang="en-IN"/>
           </a:p>
@@ -1815,7 +1815,7 @@
           <a:p>
             <a:fld id="{B620F4BC-B3A4-46AF-9AEC-8478EF1369D5}" type="datetime1">
               <a:rPr lang="en-IN" smtClean="0"/>
-              <a:t>08-09-2026</a:t>
+              <a:t>09-09-2026</a:t>
             </a:fld>
             <a:endParaRPr lang="en-IN"/>
           </a:p>
@@ -2233,7 +2233,7 @@
           <a:p>
             <a:fld id="{4C9A2993-B405-4F4D-B968-A01C27211659}" type="datetime1">
               <a:rPr lang="en-IN" smtClean="0"/>
-              <a:t>08-09-2026</a:t>
+              <a:t>09-09-2026</a:t>
             </a:fld>
             <a:endParaRPr lang="en-IN"/>
           </a:p>
@@ -2378,7 +2378,7 @@
           <a:p>
             <a:fld id="{79378C8C-5FBB-4DD7-A06D-BE263480794B}" type="datetime1">
               <a:rPr lang="en-IN" smtClean="0"/>
-              <a:t>08-09-2026</a:t>
+              <a:t>09-09-2026</a:t>
             </a:fld>
             <a:endParaRPr lang="en-IN"/>
           </a:p>
@@ -2494,7 +2494,7 @@
           <a:p>
             <a:fld id="{31FD2985-06EC-459B-80C8-F6F4362A1C03}" type="datetime1">
               <a:rPr lang="en-IN" smtClean="0"/>
-              <a:t>08-09-2026</a:t>
+              <a:t>09-09-2026</a:t>
             </a:fld>
             <a:endParaRPr lang="en-IN"/>
           </a:p>
@@ -2810,7 +2810,7 @@
           <a:p>
             <a:fld id="{71D7E9DA-13C6-48A4-9305-B592482DE8CE}" type="datetime1">
               <a:rPr lang="en-IN" smtClean="0"/>
-              <a:t>08-09-2026</a:t>
+              <a:t>09-09-2026</a:t>
             </a:fld>
             <a:endParaRPr lang="en-IN"/>
           </a:p>
@@ -3102,7 +3102,7 @@
           <a:p>
             <a:fld id="{F45E7C4B-C575-4DCF-9B63-045662930500}" type="datetime1">
               <a:rPr lang="en-IN" smtClean="0"/>
-              <a:t>08-09-2026</a:t>
+              <a:t>09-09-2026</a:t>
             </a:fld>
             <a:endParaRPr lang="en-IN"/>
           </a:p>
@@ -3348,7 +3348,7 @@
           <a:p>
             <a:fld id="{43827C3E-786B-4150-9177-1C28966A2ADC}" type="datetime1">
               <a:rPr lang="en-IN" smtClean="0"/>
-              <a:t>08-09-2026</a:t>
+              <a:t>09-09-2026</a:t>
             </a:fld>
             <a:endParaRPr lang="en-IN"/>
           </a:p>
@@ -4328,7 +4328,7 @@
                 <a:latin typeface="Times New Roman" panose="02020603050405020304" pitchFamily="18" charset="0"/>
                 <a:cs typeface="Times New Roman" panose="02020603050405020304" pitchFamily="18" charset="0"/>
               </a:rPr>
-              <a:t>08-09-2026</a:t>
+              <a:t>09-09-2026</a:t>
             </a:fld>
             <a:endParaRPr lang="en-IN">
               <a:latin typeface="Times New Roman" panose="02020603050405020304" pitchFamily="18" charset="0"/>
@@ -4638,7 +4638,7 @@
                 <a:latin typeface="Times New Roman" panose="02020603050405020304" pitchFamily="18" charset="0"/>
                 <a:cs typeface="Times New Roman" panose="02020603050405020304" pitchFamily="18" charset="0"/>
               </a:rPr>
-              <a:t>08-09-2026</a:t>
+              <a:t>09-09-2026</a:t>
             </a:fld>
             <a:endParaRPr lang="en-IN" dirty="0">
               <a:latin typeface="Times New Roman" panose="02020603050405020304" pitchFamily="18" charset="0"/>
@@ -4828,7 +4828,7 @@
                 <a:latin typeface="Times New Roman" panose="02020603050405020304" pitchFamily="18" charset="0"/>
                 <a:cs typeface="Times New Roman" panose="02020603050405020304" pitchFamily="18" charset="0"/>
               </a:rPr>
-              <a:t>08-09-2026</a:t>
+              <a:t>09-09-2026</a:t>
             </a:fld>
             <a:endParaRPr lang="en-IN" dirty="0">
               <a:latin typeface="Times New Roman" panose="02020603050405020304" pitchFamily="18" charset="0"/>
@@ -5042,7 +5042,7 @@
                 <a:latin typeface="Times New Roman" panose="02020603050405020304" pitchFamily="18" charset="0"/>
                 <a:cs typeface="Times New Roman" panose="02020603050405020304" pitchFamily="18" charset="0"/>
               </a:rPr>
-              <a:t>08-09-2026</a:t>
+              <a:t>09-09-2026</a:t>
             </a:fld>
             <a:endParaRPr lang="en-IN">
               <a:latin typeface="Times New Roman" panose="02020603050405020304" pitchFamily="18" charset="0"/>
@@ -5413,7 +5413,7 @@
                 <a:latin typeface="Times New Roman" panose="02020603050405020304" pitchFamily="18" charset="0"/>
                 <a:cs typeface="Times New Roman" panose="02020603050405020304" pitchFamily="18" charset="0"/>
               </a:rPr>
-              <a:t>08-09-2026</a:t>
+              <a:t>09-09-2026</a:t>
             </a:fld>
             <a:endParaRPr lang="en-IN">
               <a:latin typeface="Times New Roman" panose="02020603050405020304" pitchFamily="18" charset="0"/>
@@ -6347,7 +6347,7 @@
                 <a:latin typeface="Times New Roman" panose="02020603050405020304" pitchFamily="18" charset="0"/>
                 <a:cs typeface="Times New Roman" panose="02020603050405020304" pitchFamily="18" charset="0"/>
               </a:rPr>
-              <a:t>08-09-2026</a:t>
+              <a:t>09-09-2026</a:t>
             </a:fld>
             <a:endParaRPr lang="en-IN" dirty="0">
               <a:latin typeface="Times New Roman" panose="02020603050405020304" pitchFamily="18" charset="0"/>
@@ -6818,7 +6818,7 @@
                 <a:latin typeface="Times New Roman" panose="02020603050405020304" pitchFamily="18" charset="0"/>
                 <a:cs typeface="Times New Roman" panose="02020603050405020304" pitchFamily="18" charset="0"/>
               </a:rPr>
-              <a:t>08-09-2026</a:t>
+              <a:t>09-09-2026</a:t>
             </a:fld>
             <a:endParaRPr lang="en-IN">
               <a:latin typeface="Times New Roman" panose="02020603050405020304" pitchFamily="18" charset="0"/>
@@ -7197,7 +7197,7 @@
                 <a:latin typeface="Times New Roman" panose="02020603050405020304" pitchFamily="18" charset="0"/>
                 <a:cs typeface="Times New Roman" panose="02020603050405020304" pitchFamily="18" charset="0"/>
               </a:rPr>
-              <a:t>08-09-2026</a:t>
+              <a:t>09-09-2026</a:t>
             </a:fld>
             <a:endParaRPr lang="en-IN">
               <a:latin typeface="Times New Roman" panose="02020603050405020304" pitchFamily="18" charset="0"/>
@@ -7387,7 +7387,7 @@
                 <a:latin typeface="Times New Roman" panose="02020603050405020304" pitchFamily="18" charset="0"/>
                 <a:cs typeface="Times New Roman" panose="02020603050405020304" pitchFamily="18" charset="0"/>
               </a:rPr>
-              <a:t>08-09-2026</a:t>
+              <a:t>09-09-2026</a:t>
             </a:fld>
             <a:endParaRPr lang="en-IN">
               <a:latin typeface="Times New Roman" panose="02020603050405020304" pitchFamily="18" charset="0"/>
@@ -7816,40 +7816,39 @@
           </a:p>
         </p:txBody>
       </p:sp>
-      <p:sp>
-        <p:nvSpPr>
-          <p:cNvPr id="3" name="Content Placeholder 2">
-            <a:extLst>
-              <a:ext uri="{FF2B5EF4-FFF2-40B4-BE49-F238E27FC236}">
-                <a16:creationId xmlns:a16="http://schemas.microsoft.com/office/drawing/2014/main" id="{8233367C-DAD6-6E34-D21A-A981C09442F2}"/>
-              </a:ext>
-            </a:extLst>
-          </p:cNvPr>
-          <p:cNvSpPr>
-            <a:spLocks noGrp="1"/>
-          </p:cNvSpPr>
+      <p:pic>
+        <p:nvPicPr>
+          <p:cNvPr id="7" name="Content Placeholder 6">
+            <a:extLst>
+              <a:ext uri="{FF2B5EF4-FFF2-40B4-BE49-F238E27FC236}">
+                <a16:creationId xmlns:a16="http://schemas.microsoft.com/office/drawing/2014/main" id="{3982D5C9-64C2-361B-E327-B9022FA9ED35}"/>
+              </a:ext>
+            </a:extLst>
+          </p:cNvPr>
+          <p:cNvPicPr>
+            <a:picLocks noGrp="1" noChangeAspect="1"/>
+          </p:cNvPicPr>
           <p:nvPr>
             <p:ph idx="1"/>
           </p:nvPr>
-        </p:nvSpPr>
-        <p:spPr/>
-        <p:txBody>
-          <a:bodyPr/>
-          <a:lstStyle/>
-          <a:p>
-            <a:pPr>
-              <a:spcAft>
-                <a:spcPts val="600"/>
-              </a:spcAft>
-            </a:pPr>
-            <a:endParaRPr sz="1500" b="0" dirty="0">
-              <a:solidFill>
-                <a:srgbClr val="000000"/>
-              </a:solidFill>
-            </a:endParaRPr>
-          </a:p>
-        </p:txBody>
-      </p:sp>
+        </p:nvPicPr>
+        <p:blipFill>
+          <a:blip r:embed="rId2"/>
+          <a:srcRect t="12501" b="30105"/>
+          <a:stretch>
+            <a:fillRect/>
+          </a:stretch>
+        </p:blipFill>
+        <p:spPr>
+          <a:xfrm>
+            <a:off x="4204333" y="1531026"/>
+            <a:ext cx="3783333" cy="4825324"/>
+          </a:xfrm>
+          <a:prstGeom prst="rect">
+            <a:avLst/>
+          </a:prstGeom>
+        </p:spPr>
+      </p:pic>
       <p:sp>
         <p:nvSpPr>
           <p:cNvPr id="4" name="Date Placeholder 3">
@@ -7873,7 +7872,7 @@
           <a:p>
             <a:fld id="{FEA886FF-1BA7-4533-94E6-869CE1E2970B}" type="datetime1">
               <a:rPr lang="en-IN" smtClean="0"/>
-              <a:t>08-09-2026</a:t>
+              <a:t>09-09-2026</a:t>
             </a:fld>
             <a:endParaRPr lang="en-IN" dirty="0"/>
           </a:p>
@@ -8206,7 +8205,7 @@
                 <a:latin typeface="Times New Roman" panose="02020603050405020304" pitchFamily="18" charset="0"/>
                 <a:cs typeface="Times New Roman" panose="02020603050405020304" pitchFamily="18" charset="0"/>
               </a:rPr>
-              <a:t>08-09-2026</a:t>
+              <a:t>09-09-2026</a:t>
             </a:fld>
             <a:endParaRPr lang="en-IN" dirty="0">
               <a:latin typeface="Times New Roman" panose="02020603050405020304" pitchFamily="18" charset="0"/>
@@ -8447,7 +8446,7 @@
           <a:p>
             <a:fld id="{FEA886FF-1BA7-4533-94E6-869CE1E2970B}" type="datetime1">
               <a:rPr lang="en-IN" smtClean="0"/>
-              <a:t>08-09-2026</a:t>
+              <a:t>09-09-2026</a:t>
             </a:fld>
             <a:endParaRPr lang="en-IN"/>
           </a:p>
@@ -8625,7 +8624,7 @@
                 <a:latin typeface="Times New Roman" panose="02020603050405020304" pitchFamily="18" charset="0"/>
                 <a:cs typeface="Times New Roman" panose="02020603050405020304" pitchFamily="18" charset="0"/>
               </a:rPr>
-              <a:t>08-09-2026</a:t>
+              <a:t>09-09-2026</a:t>
             </a:fld>
             <a:endParaRPr lang="en-IN">
               <a:latin typeface="Times New Roman" panose="02020603050405020304" pitchFamily="18" charset="0"/>
@@ -9131,7 +9130,7 @@
                 <a:latin typeface="Times New Roman" panose="02020603050405020304" pitchFamily="18" charset="0"/>
                 <a:cs typeface="Times New Roman" panose="02020603050405020304" pitchFamily="18" charset="0"/>
               </a:rPr>
-              <a:t>08-09-2026</a:t>
+              <a:t>09-09-2026</a:t>
             </a:fld>
             <a:endParaRPr lang="en-IN">
               <a:latin typeface="Times New Roman" panose="02020603050405020304" pitchFamily="18" charset="0"/>
@@ -9321,7 +9320,7 @@
                 <a:latin typeface="Times New Roman" panose="02020603050405020304" pitchFamily="18" charset="0"/>
                 <a:cs typeface="Times New Roman" panose="02020603050405020304" pitchFamily="18" charset="0"/>
               </a:rPr>
-              <a:t>08-09-2026</a:t>
+              <a:t>09-09-2026</a:t>
             </a:fld>
             <a:endParaRPr lang="en-IN">
               <a:latin typeface="Times New Roman" panose="02020603050405020304" pitchFamily="18" charset="0"/>
@@ -9968,7 +9967,7 @@
                 <a:latin typeface="Times New Roman" panose="02020603050405020304" pitchFamily="18" charset="0"/>
                 <a:cs typeface="Times New Roman" panose="02020603050405020304" pitchFamily="18" charset="0"/>
               </a:rPr>
-              <a:t>08-09-2026</a:t>
+              <a:t>09-09-2026</a:t>
             </a:fld>
             <a:endParaRPr lang="en-IN">
               <a:latin typeface="Times New Roman" panose="02020603050405020304" pitchFamily="18" charset="0"/>
@@ -10230,7 +10229,7 @@
           <a:p>
             <a:fld id="{FEA886FF-1BA7-4533-94E6-869CE1E2970B}" type="datetime1">
               <a:rPr lang="en-IN" smtClean="0"/>
-              <a:t>08-09-2026</a:t>
+              <a:t>09-09-2026</a:t>
             </a:fld>
             <a:endParaRPr lang="en-IN"/>
           </a:p>
@@ -10408,7 +10407,7 @@
                 <a:latin typeface="Times New Roman" panose="02020603050405020304" pitchFamily="18" charset="0"/>
                 <a:cs typeface="Times New Roman" panose="02020603050405020304" pitchFamily="18" charset="0"/>
               </a:rPr>
-              <a:t>08-09-2026</a:t>
+              <a:t>09-09-2026</a:t>
             </a:fld>
             <a:endParaRPr lang="en-IN">
               <a:latin typeface="Times New Roman" panose="02020603050405020304" pitchFamily="18" charset="0"/>
@@ -10934,7 +10933,7 @@
                 <a:latin typeface="Times New Roman" panose="02020603050405020304" pitchFamily="18" charset="0"/>
                 <a:cs typeface="Times New Roman" panose="02020603050405020304" pitchFamily="18" charset="0"/>
               </a:rPr>
-              <a:t>08-09-2026</a:t>
+              <a:t>09-09-2026</a:t>
             </a:fld>
             <a:endParaRPr lang="en-IN">
               <a:latin typeface="Times New Roman" panose="02020603050405020304" pitchFamily="18" charset="0"/>
@@ -11176,7 +11175,7 @@
           <a:p>
             <a:fld id="{FEA886FF-1BA7-4533-94E6-869CE1E2970B}" type="datetime1">
               <a:rPr lang="en-IN" smtClean="0"/>
-              <a:t>08-09-2026</a:t>
+              <a:t>09-09-2026</a:t>
             </a:fld>
             <a:endParaRPr lang="en-IN"/>
           </a:p>
@@ -11531,7 +11530,7 @@
           <a:p>
             <a:fld id="{61736562-4E3F-4038-A291-A7AE35CC3E6A}" type="datetime1">
               <a:rPr lang="en-IN" smtClean="0"/>
-              <a:t>08-09-2026</a:t>
+              <a:t>09-09-2026</a:t>
             </a:fld>
             <a:endParaRPr lang="en-IN"/>
           </a:p>
@@ -11890,7 +11889,7 @@
           <a:p>
             <a:fld id="{0A7C7B6C-E68D-4047-8A1E-3C7BD2842AF7}" type="datetime1">
               <a:rPr lang="en-IN" smtClean="0"/>
-              <a:t>08-09-2026</a:t>
+              <a:t>09-09-2026</a:t>
             </a:fld>
             <a:endParaRPr lang="en-IN" dirty="0"/>
           </a:p>
@@ -12213,7 +12212,7 @@
           <a:p>
             <a:fld id="{FEA886FF-1BA7-4533-94E6-869CE1E2970B}" type="datetime1">
               <a:rPr lang="en-IN" smtClean="0"/>
-              <a:t>08-09-2026</a:t>
+              <a:t>09-09-2026</a:t>
             </a:fld>
             <a:endParaRPr lang="en-IN"/>
           </a:p>
@@ -12571,7 +12570,7 @@
           <a:p>
             <a:fld id="{0A7C7B6C-E68D-4047-8A1E-3C7BD2842AF7}" type="datetime1">
               <a:rPr lang="en-IN" smtClean="0"/>
-              <a:t>08-09-2026</a:t>
+              <a:t>09-09-2026</a:t>
             </a:fld>
             <a:endParaRPr lang="en-IN"/>
           </a:p>
@@ -12829,7 +12828,7 @@
           <a:p>
             <a:fld id="{FEA886FF-1BA7-4533-94E6-869CE1E2970B}" type="datetime1">
               <a:rPr lang="en-IN" smtClean="0"/>
-              <a:t>08-09-2026</a:t>
+              <a:t>09-09-2026</a:t>
             </a:fld>
             <a:endParaRPr lang="en-IN"/>
           </a:p>
@@ -13102,7 +13101,7 @@
           <a:p>
             <a:fld id="{22261D5D-2F82-4210-B67C-C3AADE7FED47}" type="datetime1">
               <a:rPr lang="en-IN" smtClean="0"/>
-              <a:t>08-09-2026</a:t>
+              <a:t>09-09-2026</a:t>
             </a:fld>
             <a:endParaRPr lang="en-IN"/>
           </a:p>
@@ -13415,7 +13414,7 @@
           <a:p>
             <a:fld id="{22261D5D-2F82-4210-B67C-C3AADE7FED47}" type="datetime1">
               <a:rPr lang="en-IN" smtClean="0"/>
-              <a:t>08-09-2026</a:t>
+              <a:t>09-09-2026</a:t>
             </a:fld>
             <a:endParaRPr lang="en-IN"/>
           </a:p>
@@ -13620,7 +13619,7 @@
           <a:p>
             <a:fld id="{E919193B-09C0-4C85-858C-650926A9B146}" type="datetime1">
               <a:rPr lang="en-IN" smtClean="0"/>
-              <a:t>08-09-2026</a:t>
+              <a:t>09-09-2026</a:t>
             </a:fld>
             <a:endParaRPr lang="en-IN"/>
           </a:p>
@@ -14338,7 +14337,7 @@
           <a:p>
             <a:fld id="{E919193B-09C0-4C85-858C-650926A9B146}" type="datetime1">
               <a:rPr lang="en-IN" smtClean="0"/>
-              <a:t>08-09-2026</a:t>
+              <a:t>09-09-2026</a:t>
             </a:fld>
             <a:endParaRPr lang="en-IN"/>
           </a:p>
@@ -15062,7 +15061,7 @@
           <a:p>
             <a:fld id="{49AE986A-8308-4C4E-A0F3-DDD9B5B25762}" type="datetime1">
               <a:rPr lang="en-IN" smtClean="0"/>
-              <a:t>08-09-2026</a:t>
+              <a:t>09-09-2026</a:t>
             </a:fld>
             <a:endParaRPr lang="en-IN" dirty="0"/>
           </a:p>
@@ -15310,7 +15309,7 @@
           <a:p>
             <a:fld id="{FEA886FF-1BA7-4533-94E6-869CE1E2970B}" type="datetime1">
               <a:rPr lang="en-IN" smtClean="0"/>
-              <a:t>08-09-2026</a:t>
+              <a:t>09-09-2026</a:t>
             </a:fld>
             <a:endParaRPr lang="en-IN"/>
           </a:p>
